--- a/umbral/entrega/presentacion/Umbral_presentacion.pptx
+++ b/umbral/entrega/presentacion/Umbral_presentacion.pptx
@@ -521,7 +521,7 @@
           </a:p>
           <a:p>
             <a:r>
-              <a:t>Datos agregados CCPC 2009–2024. Prototipo para revisión institucional. Fuentes primarias: https://ine.mx/transparencia/datos-abiertos/visualizacion-datos/conteos-censales-participacion/ Convocatoria: https://ine.mx/wp-content/uploads/2026/09/Convocatoria_Hackaton-1.pdf</a:t>
+              <a:t>UMBRAL. Umbral · aguas.exe · Reto 2 Fuentes: reporte metodológico; modelado/salidas/comparacion_modelos/resultados.json; entrega/caso_municipal.json; docs/FUENTES_COMPLEMENTARIAS_UMBRAL.md; docs/PLANES_ACCION_ESTATALES_PARTICIPACION.md. DOI SMS: 10.1017/S0007123424000504.</a:t>
             </a:r>
           </a:p>
         </p:txBody>
@@ -601,7 +601,7 @@
           </a:p>
           <a:p>
             <a:r>
-              <a:t>https://github.com/Donatelatrump/Ine_Hackaton_2026 · Proyección 2027 exploratoria; efecto preventivo por evaluar. Fuentes primarias: https://ine.mx/transparencia/datos-abiertos/visualizacion-datos/conteos-censales-participacion/ Convocatoria: https://ine.mx/wp-content/uploads/2026/09/Convocatoria_Hackaton-1.pdf</a:t>
+              <a:t>Referencias y documentos consultados. Copias de las fuentes mexicanas en Info_extra/ del ZIP. Referencias completas y rutas en las notas y en el reporte. Fuentes: reporte metodológico; modelado/salidas/comparacion_modelos/resultados.json; entrega/caso_municipal.json; docs/FUENTES_COMPLEMENTARIAS_UMBRAL.md; docs/PLANES_ACCION_ESTATALES_PARTICIPACION.md. DOI SMS: 10.1017/S0007123424000504.</a:t>
             </a:r>
           </a:p>
         </p:txBody>
@@ -681,7 +681,7 @@
           </a:p>
           <a:p>
             <a:r>
-              <a:t>Guía: demo/README.md. Cartografía municipal y complemento insular INEGI 2025. Fuentes primarias: https://ine.mx/transparencia/datos-abiertos/visualizacion-datos/conteos-censales-participacion/ Convocatoria: https://ine.mx/wp-content/uploads/2026/09/Convocatoria_Hackaton-1.pdf</a:t>
+              <a:t>El problema: decidir dónde actuar. Umbral · aguas.exe · Reto 2 Fuentes: reporte metodológico; modelado/salidas/comparacion_modelos/resultados.json; entrega/caso_municipal.json; docs/FUENTES_COMPLEMENTARIAS_UMBRAL.md; docs/PLANES_ACCION_ESTATALES_PARTICIPACION.md. DOI SMS: 10.1017/S0007123424000504.</a:t>
             </a:r>
           </a:p>
         </p:txBody>
@@ -761,7 +761,7 @@
           </a:p>
           <a:p>
             <a:r>
-              <a:t>Fuente: auditoría y base municipal del proyecto. CCPC: https://ine.mx/transparencia/datos-abiertos/visualizacion-datos/conteos-censales-participacion/ Fuentes primarias: https://ine.mx/transparencia/datos-abiertos/visualizacion-datos/conteos-censales-participacion/ Convocatoria: https://ine.mx/wp-content/uploads/2026/09/Convocatoria_Hackaton-1.pdf</a:t>
+              <a:t>Qué permite hacer Umbral. Umbral · aguas.exe · Reto 2 Fuentes: reporte metodológico; modelado/salidas/comparacion_modelos/resultados.json; entrega/caso_municipal.json; docs/FUENTES_COMPLEMENTARIAS_UMBRAL.md; docs/PLANES_ACCION_ESTATALES_PARTICIPACION.md. DOI SMS: 10.1017/S0007123424000504.</a:t>
             </a:r>
           </a:p>
         </p:txBody>
@@ -841,7 +841,7 @@
           </a:p>
           <a:p>
             <a:r>
-              <a:t>Fuente: modelado/PROTOCOLO_COMPARACION_4_MODELOS.md y salidas/comparacion_modelos/resultados.json. Fuentes primarias: https://ine.mx/transparencia/datos-abiertos/visualizacion-datos/conteos-censales-participacion/ Convocatoria: https://ine.mx/wp-content/uploads/2026/09/Convocatoria_Hackaton-1.pdf</a:t>
+              <a:t>Cómo predice la abstención de 2027. Fuente: CCPC 2009–2024 y comparación de cuatro modelos. Datos agregados, sin información personal. Fuentes: reporte metodológico; modelado/salidas/comparacion_modelos/resultados.json; entrega/caso_municipal.json; docs/FUENTES_COMPLEMENTARIAS_UMBRAL.md; docs/PLANES_ACCION_ESTATALES_PARTICIPACION.md. DOI SMS: 10.1017/S0007123424000504.</a:t>
             </a:r>
           </a:p>
         </p:txBody>
@@ -921,7 +921,7 @@
           </a:p>
           <a:p>
             <a:r>
-              <a:t>Media de 2021/2024 con igual peso por elección. Referencia adicional: MAE 8.88 pp. No valida 2027. Fuentes primarias: https://ine.mx/transparencia/datos-abiertos/visualizacion-datos/conteos-censales-participacion/ Convocatoria: https://ine.mx/wp-content/uploads/2026/09/Convocatoria_Hackaton-1.pdf</a:t>
+              <a:t>Qué tan bien predice. pp = puntos porcentuales. Modelo seleccionado por error medio y desempate ponderado; selección retrospectiva. Fuentes: reporte metodológico; modelado/salidas/comparacion_modelos/resultados.json; entrega/caso_municipal.json; docs/FUENTES_COMPLEMENTARIAS_UMBRAL.md; docs/PLANES_ACCION_ESTATALES_PARTICIPACION.md. DOI SMS: 10.1017/S0007123424000504.</a:t>
             </a:r>
           </a:p>
         </p:txBody>
@@ -1001,7 +1001,7 @@
           </a:p>
           <a:p>
             <a:r>
-              <a:t>DOI: 10.1017/S0007123424000504; 10.1007/s11109-026-10121-2; 10.1177/0956797609359326. Traslado a México: supuesto. Fuentes primarias: https://ine.mx/transparencia/datos-abiertos/visualizacion-datos/conteos-censales-participacion/ Convocatoria: https://ine.mx/wp-content/uploads/2026/09/Convocatoria_Hackaton-1.pdf</a:t>
+              <a:t>Consultar el territorio antes de actuar. Umbral · aguas.exe · Reto 2 Fuentes: reporte metodológico; modelado/salidas/comparacion_modelos/resultados.json; entrega/caso_municipal.json; docs/FUENTES_COMPLEMENTARIAS_UMBRAL.md; docs/PLANES_ACCION_ESTATALES_PARTICIPACION.md. DOI SMS: 10.1017/S0007123424000504.</a:t>
             </a:r>
           </a:p>
         </p:txBody>
@@ -1081,7 +1081,7 @@
           </a:p>
           <a:p>
             <a:r>
-              <a:t>Umbral y docs/PLANES_ACCION_ESTATALES_PARTICIPACION.md, sección 8. Propuestas por validar con el área usuaria. Fuentes primarias: https://ine.mx/transparencia/datos-abiertos/visualizacion-datos/conteos-censales-participacion/ Convocatoria: https://ine.mx/wp-content/uploads/2026/09/Convocatoria_Hackaton-1.pdf</a:t>
+              <a:t>Simular una acción y comparar el cambio. Capturas del escenario estatal de Quintana Roo: cobertura 10%, efecto supuesto de 1.5 pp. No son el caso SMS. Fuentes: reporte metodológico; modelado/salidas/comparacion_modelos/resultados.json; entrega/caso_municipal.json; docs/FUENTES_COMPLEMENTARIAS_UMBRAL.md; docs/PLANES_ACCION_ESTATALES_PARTICIPACION.md. DOI SMS: 10.1017/S0007123424000504.</a:t>
             </a:r>
           </a:p>
         </p:txBody>
@@ -1161,7 +1161,7 @@
           </a:p>
           <a:p>
             <a:r>
-              <a:t>Fuente: entrega/caso_municipal.json. Modelo seleccionado del benchmark. SV+NV 2024: 255,362. DOI 10.1017/S0007123424000504. Fuentes primarias: https://ine.mx/transparencia/datos-abiertos/visualizacion-datos/conteos-censales-participacion/ Convocatoria: https://ine.mx/wp-content/uploads/2026/09/Convocatoria_Hackaton-1.pdf</a:t>
+              <a:t>Planes para las 32 entidades. Propuestas del proyecto; costos y operación requieren acuerdo local. El 1.5 pp no es eficacia medida de los planes. Fuentes: reporte metodológico; modelado/salidas/comparacion_modelos/resultados.json; entrega/caso_municipal.json; docs/FUENTES_COMPLEMENTARIAS_UMBRAL.md; docs/PLANES_ACCION_ESTATALES_PARTICIPACION.md. DOI SMS: 10.1017/S0007123424000504.</a:t>
             </a:r>
           </a:p>
         </p:txBody>
@@ -1241,7 +1241,7 @@
           </a:p>
           <a:p>
             <a:r>
-              <a:t>Caso completo: entrega/CASO_MUNICIPAL.md. Guion de cuatro bloques: entrega/GUION_PRESENTACION.md. Fuentes primarias: https://ine.mx/transparencia/datos-abiertos/visualizacion-datos/conteos-censales-participacion/ Convocatoria: https://ine.mx/wp-content/uploads/2026/09/Convocatoria_Hackaton-1.pdf</a:t>
+              <a:t>SMS en Solidaridad: cobertura municipal. Población: proyección CONAPO 2027. SMS: Lindgren et al. (2025), transferencia hipotética. Estabilidad top50: 4/6. Fuentes: reporte metodológico; modelado/salidas/comparacion_modelos/resultados.json; entrega/caso_municipal.json; docs/FUENTES_COMPLEMENTARIAS_UMBRAL.md; docs/PLANES_ACCION_ESTATALES_PARTICIPACION.md. DOI SMS: 10.1017/S0007123424000504.</a:t>
             </a:r>
           </a:p>
         </p:txBody>
@@ -4238,7 +4238,7 @@
 </file>
 
 <file path=ppt/slides/slide1.xml><?xml version="1.0" encoding="utf-8"?>
-<p:sld xmlns:a="http://schemas.openxmlformats.org/drawingml/2006/main" xmlns:p="http://schemas.openxmlformats.org/presentationml/2006/main">
+<p:sld xmlns:a="http://schemas.openxmlformats.org/drawingml/2006/main" xmlns:p="http://schemas.openxmlformats.org/presentationml/2006/main" xmlns:r="http://schemas.openxmlformats.org/officeDocument/2006/relationships">
   <p:cSld>
     <p:bg>
       <p:bgPr>
@@ -4255,16 +4255,64 @@
         <p:nvPr/>
       </p:nvGrpSpPr>
       <p:grpSpPr/>
-      <p:sp>
-        <p:nvSpPr>
-          <p:cNvPr id="3" name="Texto editable"/>
+      <p:pic>
+        <p:nvPicPr>
+          <p:cNvPr id="3" name="Captura real de Umbral"/>
+          <p:cNvPicPr>
+            <a:picLocks noChangeAspect="1"/>
+          </p:cNvPicPr>
+          <p:nvPr/>
+        </p:nvPicPr>
+        <p:blipFill>
+          <a:blip r:embed="rIdUmbral3"/>
+          <a:stretch>
+            <a:fillRect/>
+          </a:stretch>
+        </p:blipFill>
+        <p:spPr>
+          <a:xfrm>
+            <a:off x="502920" y="274320"/>
+            <a:ext cx="960120" cy="960120"/>
+          </a:xfrm>
+          <a:prstGeom prst="rect">
+            <a:avLst/>
+          </a:prstGeom>
+        </p:spPr>
+      </p:pic>
+      <p:pic>
+        <p:nvPicPr>
+          <p:cNvPr id="4" name="Captura real de Umbral"/>
+          <p:cNvPicPr>
+            <a:picLocks noChangeAspect="1"/>
+          </p:cNvPicPr>
+          <p:nvPr/>
+        </p:nvPicPr>
+        <p:blipFill>
+          <a:blip r:embed="rIdUmbral4"/>
+          <a:stretch>
+            <a:fillRect/>
+          </a:stretch>
+        </p:blipFill>
+        <p:spPr>
+          <a:xfrm>
+            <a:off x="9292182" y="274320"/>
+            <a:ext cx="2309676" cy="1051560"/>
+          </a:xfrm>
+          <a:prstGeom prst="rect">
+            <a:avLst/>
+          </a:prstGeom>
+        </p:spPr>
+      </p:pic>
+      <p:sp>
+        <p:nvSpPr>
+          <p:cNvPr id="5" name="Predicción de abstención electoral 2027"/>
           <p:cNvSpPr txBox="1"/>
           <p:nvPr/>
         </p:nvSpPr>
         <p:spPr>
           <a:xfrm>
-            <a:off x="594360" y="320040"/>
-            <a:ext cx="10972800" cy="259080"/>
+            <a:off x="502920" y="1417320"/>
+            <a:ext cx="5577840" cy="1071372"/>
           </a:xfrm>
           <a:prstGeom prst="rect">
             <a:avLst/>
@@ -4273,32 +4321,43 @@
         </p:spPr>
         <p:txBody>
           <a:bodyPr wrap="square" lIns="0" rIns="0" tIns="0" bIns="0">
-            <a:spAutoFit/>
+            <a:noAutofit/>
           </a:bodyPr>
           <a:lstStyle/>
           <a:p>
             <a:r>
-              <a:rPr sz="1200" b="1">
-                <a:solidFill>
-                  <a:srgbClr val="10685F"/>
-                </a:solidFill>
-                <a:latin typeface="Segoe UI"/>
-              </a:rPr>
-              <a:t>UMBRAL · 01</a:t>
-            </a:r>
-          </a:p>
-        </p:txBody>
-      </p:sp>
-      <p:sp>
-        <p:nvSpPr>
-          <p:cNvPr id="4" name="Texto editable"/>
+              <a:rPr sz="3000" b="1">
+                <a:solidFill>
+                  <a:srgbClr val="15353B"/>
+                </a:solidFill>
+                <a:latin typeface="Segoe UI"/>
+              </a:rPr>
+              <a:t>Predicción de abstención</a:t>
+            </a:r>
+          </a:p>
+          <a:p>
+            <a:r>
+              <a:rPr sz="3000" b="1">
+                <a:solidFill>
+                  <a:srgbClr val="15353B"/>
+                </a:solidFill>
+                <a:latin typeface="Segoe UI"/>
+              </a:rPr>
+              <a:t>electoral 2027</a:t>
+            </a:r>
+          </a:p>
+        </p:txBody>
+      </p:sp>
+      <p:sp>
+        <p:nvSpPr>
+          <p:cNvPr id="6" name="Información territorial, simulación de a"/>
           <p:cNvSpPr txBox="1"/>
           <p:nvPr/>
         </p:nvSpPr>
         <p:spPr>
           <a:xfrm>
-            <a:off x="594360" y="822960"/>
-            <a:ext cx="10972800" cy="754888"/>
+            <a:off x="502920" y="2788920"/>
+            <a:ext cx="5303520" cy="912622"/>
           </a:xfrm>
           <a:prstGeom prst="rect">
             <a:avLst/>
@@ -4307,32 +4366,43 @@
         </p:spPr>
         <p:txBody>
           <a:bodyPr wrap="square" lIns="0" rIns="0" tIns="0" bIns="0">
-            <a:spAutoFit/>
+            <a:noAutofit/>
           </a:bodyPr>
           <a:lstStyle/>
           <a:p>
             <a:r>
-              <a:rPr sz="4400" b="1">
-                <a:solidFill>
-                  <a:srgbClr val="10685F"/>
-                </a:solidFill>
-                <a:latin typeface="Segoe UI"/>
-              </a:rPr>
-              <a:t>UMBRAL</a:t>
-            </a:r>
-          </a:p>
-        </p:txBody>
-      </p:sp>
-      <p:sp>
-        <p:nvSpPr>
-          <p:cNvPr id="5" name="Texto editable"/>
+              <a:rPr sz="2500" b="0">
+                <a:solidFill>
+                  <a:srgbClr val="15353B"/>
+                </a:solidFill>
+                <a:latin typeface="Segoe UI"/>
+              </a:rPr>
+              <a:t>Información territorial, simulación de</a:t>
+            </a:r>
+          </a:p>
+          <a:p>
+            <a:r>
+              <a:rPr sz="2500" b="0">
+                <a:solidFill>
+                  <a:srgbClr val="15353B"/>
+                </a:solidFill>
+                <a:latin typeface="Segoe UI"/>
+              </a:rPr>
+              <a:t>acciones y planes estatales.</a:t>
+            </a:r>
+          </a:p>
+        </p:txBody>
+      </p:sp>
+      <p:sp>
+        <p:nvSpPr>
+          <p:cNvPr id="7" name="Martin Isai Nuñez Villeda&#10; y Cesar Donne"/>
           <p:cNvSpPr txBox="1"/>
           <p:nvPr/>
         </p:nvSpPr>
         <p:spPr>
           <a:xfrm>
-            <a:off x="594360" y="2377440"/>
-            <a:ext cx="10881360" cy="506984"/>
+            <a:off x="502920" y="4892040"/>
+            <a:ext cx="5486400" cy="626872"/>
           </a:xfrm>
           <a:prstGeom prst="rect">
             <a:avLst/>
@@ -4341,32 +4411,67 @@
         </p:spPr>
         <p:txBody>
           <a:bodyPr wrap="square" lIns="0" rIns="0" tIns="0" bIns="0">
-            <a:spAutoFit/>
+            <a:noAutofit/>
           </a:bodyPr>
           <a:lstStyle/>
           <a:p>
             <a:r>
-              <a:rPr sz="2800" b="1">
-                <a:solidFill>
-                  <a:srgbClr val="10685F"/>
-                </a:solidFill>
-                <a:latin typeface="Segoe UI"/>
-              </a:rPr>
-              <a:t>Atlas de decisión municipal</a:t>
-            </a:r>
-          </a:p>
-        </p:txBody>
-      </p:sp>
-      <p:sp>
-        <p:nvSpPr>
-          <p:cNvPr id="6" name="Texto editable"/>
+              <a:rPr sz="1600" b="0">
+                <a:solidFill>
+                  <a:srgbClr val="15353B"/>
+                </a:solidFill>
+                <a:latin typeface="Segoe UI"/>
+              </a:rPr>
+              <a:t>Martin Isai Nuñez Villeda y Cesar Donnet Hernandez</a:t>
+            </a:r>
+          </a:p>
+          <a:p>
+            <a:r>
+              <a:rPr sz="1600" b="0">
+                <a:solidFill>
+                  <a:srgbClr val="15353B"/>
+                </a:solidFill>
+                <a:latin typeface="Segoe UI"/>
+              </a:rPr>
+              <a:t>Gastelum</a:t>
+            </a:r>
+          </a:p>
+        </p:txBody>
+      </p:sp>
+      <p:pic>
+        <p:nvPicPr>
+          <p:cNvPr id="8" name="Captura real de Umbral"/>
+          <p:cNvPicPr>
+            <a:picLocks noChangeAspect="1"/>
+          </p:cNvPicPr>
+          <p:nvPr/>
+        </p:nvPicPr>
+        <p:blipFill>
+          <a:blip r:embed="rIdUmbral5"/>
+          <a:stretch>
+            <a:fillRect/>
+          </a:stretch>
+        </p:blipFill>
+        <p:spPr>
+          <a:xfrm>
+            <a:off x="6263640" y="2164801"/>
+            <a:ext cx="5303520" cy="2848438"/>
+          </a:xfrm>
+          <a:prstGeom prst="rect">
+            <a:avLst/>
+          </a:prstGeom>
+        </p:spPr>
+      </p:pic>
+      <p:sp>
+        <p:nvSpPr>
+          <p:cNvPr id="9" name="Umbral · aguas.exe · Reto 2"/>
           <p:cNvSpPr txBox="1"/>
           <p:nvPr/>
         </p:nvSpPr>
         <p:spPr>
           <a:xfrm>
-            <a:off x="594360" y="3012440"/>
-            <a:ext cx="10881360" cy="414020"/>
+            <a:off x="502920" y="6419088"/>
+            <a:ext cx="11155680" cy="277622"/>
           </a:xfrm>
           <a:prstGeom prst="rect">
             <a:avLst/>
@@ -4375,154 +4480,18 @@
         </p:spPr>
         <p:txBody>
           <a:bodyPr wrap="square" lIns="0" rIns="0" tIns="0" bIns="0">
-            <a:spAutoFit/>
+            <a:noAutofit/>
           </a:bodyPr>
           <a:lstStyle/>
           <a:p>
             <a:r>
-              <a:rPr sz="2200" b="0">
-                <a:solidFill>
-                  <a:srgbClr val="15353B"/>
-                </a:solidFill>
-                <a:latin typeface="Segoe UI"/>
-              </a:rPr>
-              <a:t>Revisión territorial con evidencia, capacidad y supuestos visibles</a:t>
-            </a:r>
-          </a:p>
-        </p:txBody>
-      </p:sp>
-      <p:sp>
-        <p:nvSpPr>
-          <p:cNvPr id="7" name="Texto editable"/>
-          <p:cNvSpPr txBox="1"/>
-          <p:nvPr/>
-        </p:nvSpPr>
-        <p:spPr>
-          <a:xfrm>
-            <a:off x="594360" y="3554476"/>
-            <a:ext cx="10881360" cy="352044"/>
-          </a:xfrm>
-          <a:prstGeom prst="rect">
-            <a:avLst/>
-          </a:prstGeom>
-          <a:noFill/>
-        </p:spPr>
-        <p:txBody>
-          <a:bodyPr wrap="square" lIns="0" rIns="0" tIns="0" bIns="0">
-            <a:spAutoFit/>
-          </a:bodyPr>
-          <a:lstStyle/>
-          <a:p>
-            <a:r>
-              <a:rPr sz="1800" b="0">
-                <a:solidFill>
-                  <a:srgbClr val="15353B"/>
-                </a:solidFill>
-                <a:latin typeface="Segoe UI"/>
-              </a:rPr>
-              <a:t>aguas.exe · Hackathon INE 2026 · Track 2</a:t>
-            </a:r>
-          </a:p>
-        </p:txBody>
-      </p:sp>
-      <p:sp>
-        <p:nvSpPr>
-          <p:cNvPr id="8" name="Texto editable"/>
-          <p:cNvSpPr txBox="1"/>
-          <p:nvPr/>
-        </p:nvSpPr>
-        <p:spPr>
-          <a:xfrm>
-            <a:off x="594360" y="4034536"/>
-            <a:ext cx="10881360" cy="336550"/>
-          </a:xfrm>
-          <a:prstGeom prst="rect">
-            <a:avLst/>
-          </a:prstGeom>
-          <a:noFill/>
-        </p:spPr>
-        <p:txBody>
-          <a:bodyPr wrap="square" lIns="0" rIns="0" tIns="0" bIns="0">
-            <a:spAutoFit/>
-          </a:bodyPr>
-          <a:lstStyle/>
-          <a:p>
-            <a:r>
-              <a:rPr sz="1700" b="0">
-                <a:solidFill>
-                  <a:srgbClr val="15353B"/>
-                </a:solidFill>
-                <a:latin typeface="Segoe UI"/>
-              </a:rPr>
-              <a:t>Martin Isai Nuñez Villeda y Cesar Donnet Hernandez Gastelum</a:t>
-            </a:r>
-          </a:p>
-        </p:txBody>
-      </p:sp>
-      <p:sp>
-        <p:nvSpPr>
-          <p:cNvPr id="9" name="Texto editable"/>
-          <p:cNvSpPr txBox="1"/>
-          <p:nvPr/>
-        </p:nvSpPr>
-        <p:spPr>
-          <a:xfrm>
-            <a:off x="594360" y="4499102"/>
-            <a:ext cx="10881360" cy="336550"/>
-          </a:xfrm>
-          <a:prstGeom prst="rect">
-            <a:avLst/>
-          </a:prstGeom>
-          <a:noFill/>
-        </p:spPr>
-        <p:txBody>
-          <a:bodyPr wrap="square" lIns="0" rIns="0" tIns="0" bIns="0">
-            <a:spAutoFit/>
-          </a:bodyPr>
-          <a:lstStyle/>
-          <a:p>
-            <a:r>
-              <a:rPr sz="1700" b="0">
-                <a:solidFill>
-                  <a:srgbClr val="15353B"/>
-                </a:solidFill>
-                <a:latin typeface="Segoe UI"/>
-              </a:rPr>
-              <a:t>Versión técnica · 22 de octubre de 2026</a:t>
-            </a:r>
-          </a:p>
-        </p:txBody>
-      </p:sp>
-      <p:sp>
-        <p:nvSpPr>
-          <p:cNvPr id="10" name="Texto editable"/>
-          <p:cNvSpPr txBox="1"/>
-          <p:nvPr/>
-        </p:nvSpPr>
-        <p:spPr>
-          <a:xfrm>
-            <a:off x="594360" y="6245352"/>
-            <a:ext cx="10881360" cy="228092"/>
-          </a:xfrm>
-          <a:prstGeom prst="rect">
-            <a:avLst/>
-          </a:prstGeom>
-          <a:noFill/>
-        </p:spPr>
-        <p:txBody>
-          <a:bodyPr wrap="square" lIns="0" rIns="0" tIns="0" bIns="0">
-            <a:spAutoFit/>
-          </a:bodyPr>
-          <a:lstStyle/>
-          <a:p>
-            <a:r>
               <a:rPr sz="1000" b="0">
                 <a:solidFill>
                   <a:srgbClr val="587177"/>
                 </a:solidFill>
                 <a:latin typeface="Segoe UI"/>
               </a:rPr>
-              <a:t>Datos agregados CCPC 2009–2024. Prototipo para revisión institucional.</a:t>
+              <a:t>Umbral · aguas.exe · Reto 2</a:t>
             </a:r>
           </a:p>
         </p:txBody>
@@ -4555,14 +4524,14 @@
       <p:grpSpPr/>
       <p:sp>
         <p:nvSpPr>
-          <p:cNvPr id="3" name="Texto editable"/>
+          <p:cNvPr id="3" name="Referencias y documentos consultados"/>
           <p:cNvSpPr txBox="1"/>
           <p:nvPr/>
         </p:nvSpPr>
         <p:spPr>
           <a:xfrm>
-            <a:off x="594360" y="320040"/>
-            <a:ext cx="10972800" cy="259080"/>
+            <a:off x="502920" y="320040"/>
+            <a:ext cx="11247120" cy="658622"/>
           </a:xfrm>
           <a:prstGeom prst="rect">
             <a:avLst/>
@@ -4571,32 +4540,32 @@
         </p:spPr>
         <p:txBody>
           <a:bodyPr wrap="square" lIns="0" rIns="0" tIns="0" bIns="0">
-            <a:spAutoFit/>
+            <a:noAutofit/>
           </a:bodyPr>
           <a:lstStyle/>
           <a:p>
             <a:r>
-              <a:rPr sz="1200" b="1">
+              <a:rPr sz="3400" b="1">
                 <a:solidFill>
                   <a:srgbClr val="10685F"/>
                 </a:solidFill>
                 <a:latin typeface="Segoe UI"/>
               </a:rPr>
-              <a:t>UMBRAL · 10</a:t>
-            </a:r>
-          </a:p>
-        </p:txBody>
-      </p:sp>
-      <p:sp>
-        <p:nvSpPr>
-          <p:cNvPr id="4" name="Texto editable"/>
+              <a:t>Referencias y documentos consultados</a:t>
+            </a:r>
+          </a:p>
+        </p:txBody>
+      </p:sp>
+      <p:sp>
+        <p:nvSpPr>
+          <p:cNvPr id="4" name="INE. Conteos Censales de Participación C"/>
           <p:cNvSpPr txBox="1"/>
           <p:nvPr/>
         </p:nvSpPr>
         <p:spPr>
           <a:xfrm>
-            <a:off x="594360" y="822960"/>
-            <a:ext cx="10972800" cy="568960"/>
+            <a:off x="594360" y="1325880"/>
+            <a:ext cx="5440680" cy="626872"/>
           </a:xfrm>
           <a:prstGeom prst="rect">
             <a:avLst/>
@@ -4605,32 +4574,43 @@
         </p:spPr>
         <p:txBody>
           <a:bodyPr wrap="square" lIns="0" rIns="0" tIns="0" bIns="0">
-            <a:spAutoFit/>
+            <a:noAutofit/>
           </a:bodyPr>
           <a:lstStyle/>
           <a:p>
             <a:r>
-              <a:rPr sz="3200" b="1">
+              <a:rPr sz="1600" b="0">
                 <a:solidFill>
                   <a:srgbClr val="15353B"/>
                 </a:solidFill>
                 <a:latin typeface="Segoe UI"/>
               </a:rPr>
-              <a:t>Siguiente decisión: un piloto acotado</a:t>
-            </a:r>
-          </a:p>
-        </p:txBody>
-      </p:sp>
-      <p:sp>
-        <p:nvSpPr>
-          <p:cNvPr id="5" name="Texto editable"/>
+              <a:t>INE. Conteos Censales de Participación Ciudadana</a:t>
+            </a:r>
+          </a:p>
+          <a:p>
+            <a:r>
+              <a:rPr sz="1600" b="0">
+                <a:solidFill>
+                  <a:srgbClr val="15353B"/>
+                </a:solidFill>
+                <a:latin typeface="Segoe UI"/>
+              </a:rPr>
+              <a:t>2009–2024 y manual de campos.</a:t>
+            </a:r>
+          </a:p>
+        </p:txBody>
+      </p:sp>
+      <p:sp>
+        <p:nvSpPr>
+          <p:cNvPr id="5" name="INE (2016). Estudio censal de participac"/>
           <p:cNvSpPr txBox="1"/>
           <p:nvPr/>
         </p:nvSpPr>
         <p:spPr>
           <a:xfrm>
-            <a:off x="594360" y="1965960"/>
-            <a:ext cx="10881360" cy="475996"/>
+            <a:off x="594360" y="2121408"/>
+            <a:ext cx="5440680" cy="626872"/>
           </a:xfrm>
           <a:prstGeom prst="rect">
             <a:avLst/>
@@ -4639,32 +4619,43 @@
         </p:spPr>
         <p:txBody>
           <a:bodyPr wrap="square" lIns="0" rIns="0" tIns="0" bIns="0">
-            <a:spAutoFit/>
+            <a:noAutofit/>
           </a:bodyPr>
           <a:lstStyle/>
           <a:p>
             <a:r>
-              <a:rPr sz="2600" b="1">
-                <a:solidFill>
-                  <a:srgbClr val="10685F"/>
-                </a:solidFill>
-                <a:latin typeface="Segoe UI"/>
-              </a:rPr>
-              <a:t>Validación con el área usuaria</a:t>
-            </a:r>
-          </a:p>
-        </p:txBody>
-      </p:sp>
-      <p:sp>
-        <p:nvSpPr>
-          <p:cNvPr id="6" name="Texto editable"/>
+              <a:rPr sz="1600" b="0">
+                <a:solidFill>
+                  <a:srgbClr val="15353B"/>
+                </a:solidFill>
+                <a:latin typeface="Segoe UI"/>
+              </a:rPr>
+              <a:t>INE (2016). Estudio censal de participación ciudadana:</a:t>
+            </a:r>
+          </a:p>
+          <a:p>
+            <a:r>
+              <a:rPr sz="1600" b="0">
+                <a:solidFill>
+                  <a:srgbClr val="15353B"/>
+                </a:solidFill>
+                <a:latin typeface="Segoe UI"/>
+              </a:rPr>
+              <a:t>elecciones federales de 2015.</a:t>
+            </a:r>
+          </a:p>
+        </p:txBody>
+      </p:sp>
+      <p:sp>
+        <p:nvSpPr>
+          <p:cNvPr id="6" name="INE (2024). Estudio muestral de particip"/>
           <p:cNvSpPr txBox="1"/>
           <p:nvPr/>
         </p:nvSpPr>
         <p:spPr>
           <a:xfrm>
-            <a:off x="594360" y="2569972"/>
-            <a:ext cx="10881360" cy="754888"/>
+            <a:off x="594360" y="2916936"/>
+            <a:ext cx="5440680" cy="626872"/>
           </a:xfrm>
           <a:prstGeom prst="rect">
             <a:avLst/>
@@ -4673,32 +4664,43 @@
         </p:spPr>
         <p:txBody>
           <a:bodyPr wrap="square" lIns="0" rIns="0" tIns="0" bIns="0">
-            <a:spAutoFit/>
+            <a:noAutofit/>
           </a:bodyPr>
           <a:lstStyle/>
           <a:p>
             <a:r>
-              <a:rPr sz="2200" b="0">
+              <a:rPr sz="1600" b="0">
                 <a:solidFill>
                   <a:srgbClr val="15353B"/>
                 </a:solidFill>
                 <a:latin typeface="Segoe UI"/>
               </a:rPr>
-              <a:t>Acordar objetivo de priorización, capacidad real y protocolo de revisión territorial. Elegir acciones con cobertura que pueda medirse.</a:t>
-            </a:r>
-          </a:p>
-        </p:txBody>
-      </p:sp>
-      <p:sp>
-        <p:nvSpPr>
-          <p:cNvPr id="7" name="Texto editable"/>
+              <a:t>INE (2024). Estudio muestral de participación ciudadana,</a:t>
+            </a:r>
+          </a:p>
+          <a:p>
+            <a:r>
+              <a:rPr sz="1600" b="0">
+                <a:solidFill>
+                  <a:srgbClr val="15353B"/>
+                </a:solidFill>
+                <a:latin typeface="Segoe UI"/>
+              </a:rPr>
+              <a:t>proceso 2023–2024.</a:t>
+            </a:r>
+          </a:p>
+        </p:txBody>
+      </p:sp>
+      <p:sp>
+        <p:nvSpPr>
+          <p:cNvPr id="7" name="INE / INEGI (2021). ENCUCI 2020: present"/>
           <p:cNvSpPr txBox="1"/>
           <p:nvPr/>
         </p:nvSpPr>
         <p:spPr>
           <a:xfrm>
-            <a:off x="594360" y="3452876"/>
-            <a:ext cx="10881360" cy="475996"/>
+            <a:off x="594360" y="3712464"/>
+            <a:ext cx="5440680" cy="372872"/>
           </a:xfrm>
           <a:prstGeom prst="rect">
             <a:avLst/>
@@ -4707,32 +4709,32 @@
         </p:spPr>
         <p:txBody>
           <a:bodyPr wrap="square" lIns="0" rIns="0" tIns="0" bIns="0">
-            <a:spAutoFit/>
+            <a:noAutofit/>
           </a:bodyPr>
           <a:lstStyle/>
           <a:p>
             <a:r>
-              <a:rPr sz="2600" b="1">
-                <a:solidFill>
-                  <a:srgbClr val="10685F"/>
-                </a:solidFill>
-                <a:latin typeface="Segoe UI"/>
-              </a:rPr>
-              <a:t>Evaluación antes de ampliar</a:t>
-            </a:r>
-          </a:p>
-        </p:txBody>
-      </p:sp>
-      <p:sp>
-        <p:nvSpPr>
-          <p:cNvPr id="8" name="Texto editable"/>
+              <a:rPr sz="1600" b="0">
+                <a:solidFill>
+                  <a:srgbClr val="15353B"/>
+                </a:solidFill>
+                <a:latin typeface="Segoe UI"/>
+              </a:rPr>
+              <a:t>INE / INEGI (2021). ENCUCI 2020: presentación ejecutiva.</a:t>
+            </a:r>
+          </a:p>
+        </p:txBody>
+      </p:sp>
+      <p:sp>
+        <p:nvSpPr>
+          <p:cNvPr id="8" name="INE (2026). Acuerdo INE/CG61/2026. Imple"/>
           <p:cNvSpPr txBox="1"/>
           <p:nvPr/>
         </p:nvSpPr>
         <p:spPr>
           <a:xfrm>
-            <a:off x="594360" y="4056888"/>
-            <a:ext cx="10881360" cy="754888"/>
+            <a:off x="594360" y="4507992"/>
+            <a:ext cx="5440680" cy="626872"/>
           </a:xfrm>
           <a:prstGeom prst="rect">
             <a:avLst/>
@@ -4741,32 +4743,43 @@
         </p:spPr>
         <p:txBody>
           <a:bodyPr wrap="square" lIns="0" rIns="0" tIns="0" bIns="0">
-            <a:spAutoFit/>
+            <a:noAutofit/>
           </a:bodyPr>
           <a:lstStyle/>
           <a:p>
             <a:r>
-              <a:rPr sz="2200" b="0">
+              <a:rPr sz="1600" b="0">
                 <a:solidFill>
                   <a:srgbClr val="15353B"/>
                 </a:solidFill>
                 <a:latin typeface="Segoe UI"/>
               </a:rPr>
-              <a:t>Predefinir indicadores y asignación del piloto. Conservar la referencia y publicar resultados favorables y adversos.</a:t>
-            </a:r>
-          </a:p>
-        </p:txBody>
-      </p:sp>
-      <p:sp>
-        <p:nvSpPr>
-          <p:cNvPr id="9" name="Texto editable"/>
+              <a:t>INE (2026). Acuerdo INE/CG61/2026. Implementación de</a:t>
+            </a:r>
+          </a:p>
+          <a:p>
+            <a:r>
+              <a:rPr sz="1600" b="0">
+                <a:solidFill>
+                  <a:srgbClr val="15353B"/>
+                </a:solidFill>
+                <a:latin typeface="Segoe UI"/>
+              </a:rPr>
+              <a:t>ENCÍVICA 2024–2026.</a:t>
+            </a:r>
+          </a:p>
+        </p:txBody>
+      </p:sp>
+      <p:sp>
+        <p:nvSpPr>
+          <p:cNvPr id="9" name="CONAPO. Proyecciones municipales: poblac"/>
           <p:cNvSpPr txBox="1"/>
           <p:nvPr/>
         </p:nvSpPr>
         <p:spPr>
           <a:xfrm>
-            <a:off x="594360" y="4939792"/>
-            <a:ext cx="10881360" cy="367538"/>
+            <a:off x="594360" y="5303520"/>
+            <a:ext cx="5440680" cy="626872"/>
           </a:xfrm>
           <a:prstGeom prst="rect">
             <a:avLst/>
@@ -4775,32 +4788,43 @@
         </p:spPr>
         <p:txBody>
           <a:bodyPr wrap="square" lIns="0" rIns="0" tIns="0" bIns="0">
-            <a:spAutoFit/>
+            <a:noAutofit/>
           </a:bodyPr>
           <a:lstStyle/>
           <a:p>
             <a:r>
-              <a:rPr sz="1900" b="0">
+              <a:rPr sz="1600" b="0">
                 <a:solidFill>
                   <a:srgbClr val="15353B"/>
                 </a:solidFill>
                 <a:latin typeface="Segoe UI"/>
               </a:rPr>
-              <a:t>Equipo: aguas.exe · Código, datos y guía de ejecución en el repositorio.</a:t>
-            </a:r>
-          </a:p>
-        </p:txBody>
-      </p:sp>
-      <p:sp>
-        <p:nvSpPr>
-          <p:cNvPr id="10" name="Texto editable"/>
+              <a:t>CONAPO. Proyecciones municipales: población a mitad de</a:t>
+            </a:r>
+          </a:p>
+          <a:p>
+            <a:r>
+              <a:rPr sz="1600" b="0">
+                <a:solidFill>
+                  <a:srgbClr val="15353B"/>
+                </a:solidFill>
+                <a:latin typeface="Segoe UI"/>
+              </a:rPr>
+              <a:t>año, Solidaridad 2027.</a:t>
+            </a:r>
+          </a:p>
+        </p:txBody>
+      </p:sp>
+      <p:sp>
+        <p:nvSpPr>
+          <p:cNvPr id="10" name="IFE. Informe preliminar sobre abstencion"/>
           <p:cNvSpPr txBox="1"/>
           <p:nvPr/>
         </p:nvSpPr>
         <p:spPr>
           <a:xfrm>
-            <a:off x="594360" y="6245352"/>
-            <a:ext cx="10881360" cy="228092"/>
+            <a:off x="6355080" y="1325880"/>
+            <a:ext cx="5440680" cy="626872"/>
           </a:xfrm>
           <a:prstGeom prst="rect">
             <a:avLst/>
@@ -4809,18 +4833,310 @@
         </p:spPr>
         <p:txBody>
           <a:bodyPr wrap="square" lIns="0" rIns="0" tIns="0" bIns="0">
-            <a:spAutoFit/>
+            <a:noAutofit/>
           </a:bodyPr>
           <a:lstStyle/>
           <a:p>
             <a:r>
+              <a:rPr sz="1600" b="0">
+                <a:solidFill>
+                  <a:srgbClr val="15353B"/>
+                </a:solidFill>
+                <a:latin typeface="Segoe UI"/>
+              </a:rPr>
+              <a:t>IFE. Informe preliminar sobre abstencionismo en México.</a:t>
+            </a:r>
+          </a:p>
+          <a:p>
+            <a:r>
+              <a:rPr sz="1600" b="0">
+                <a:solidFill>
+                  <a:srgbClr val="15353B"/>
+                </a:solidFill>
+                <a:latin typeface="Segoe UI"/>
+              </a:rPr>
+              <a:t>González Rodríguez (2024): tesis sobre juventudes y redes.</a:t>
+            </a:r>
+          </a:p>
+        </p:txBody>
+      </p:sp>
+      <p:sp>
+        <p:nvSpPr>
+          <p:cNvPr id="11" name="Central Electoral. Presentan en Durango "/>
+          <p:cNvSpPr txBox="1"/>
+          <p:nvPr/>
+        </p:nvSpPr>
+        <p:spPr>
+          <a:xfrm>
+            <a:off x="6355080" y="2121408"/>
+            <a:ext cx="5440680" cy="880872"/>
+          </a:xfrm>
+          <a:prstGeom prst="rect">
+            <a:avLst/>
+          </a:prstGeom>
+          <a:noFill/>
+        </p:spPr>
+        <p:txBody>
+          <a:bodyPr wrap="square" lIns="0" rIns="0" tIns="0" bIns="0">
+            <a:noAutofit/>
+          </a:bodyPr>
+          <a:lstStyle/>
+          <a:p>
+            <a:r>
+              <a:rPr sz="1600" b="0">
+                <a:solidFill>
+                  <a:srgbClr val="15353B"/>
+                </a:solidFill>
+                <a:latin typeface="Segoe UI"/>
+              </a:rPr>
+              <a:t>Central Electoral. Presentan en Durango investigación</a:t>
+            </a:r>
+          </a:p>
+          <a:p>
+            <a:r>
+              <a:rPr sz="1600" b="0">
+                <a:solidFill>
+                  <a:srgbClr val="15353B"/>
+                </a:solidFill>
+                <a:latin typeface="Segoe UI"/>
+              </a:rPr>
+              <a:t>sobre participación política y electoral de las juventudes en</a:t>
+            </a:r>
+          </a:p>
+          <a:p>
+            <a:r>
+              <a:rPr sz="1600" b="0">
+                <a:solidFill>
+                  <a:srgbClr val="15353B"/>
+                </a:solidFill>
+                <a:latin typeface="Segoe UI"/>
+              </a:rPr>
+              <a:t>México.</a:t>
+            </a:r>
+          </a:p>
+        </p:txBody>
+      </p:sp>
+      <p:sp>
+        <p:nvSpPr>
+          <p:cNvPr id="12" name="Lindgren, Nyman y Oskarsson (2025). SMS,"/>
+          <p:cNvSpPr txBox="1"/>
+          <p:nvPr/>
+        </p:nvSpPr>
+        <p:spPr>
+          <a:xfrm>
+            <a:off x="6355080" y="2916936"/>
+            <a:ext cx="5440680" cy="626872"/>
+          </a:xfrm>
+          <a:prstGeom prst="rect">
+            <a:avLst/>
+          </a:prstGeom>
+          <a:noFill/>
+        </p:spPr>
+        <p:txBody>
+          <a:bodyPr wrap="square" lIns="0" rIns="0" tIns="0" bIns="0">
+            <a:noAutofit/>
+          </a:bodyPr>
+          <a:lstStyle/>
+          <a:p>
+            <a:r>
+              <a:rPr sz="1600" b="0">
+                <a:solidFill>
+                  <a:srgbClr val="15353B"/>
+                </a:solidFill>
+                <a:latin typeface="Segoe UI"/>
+              </a:rPr>
+              <a:t>Lindgren, Nyman y Oskarsson (2025). SMS, Suecia. DOI:</a:t>
+            </a:r>
+          </a:p>
+          <a:p>
+            <a:r>
+              <a:rPr sz="1600" b="0">
+                <a:solidFill>
+                  <a:srgbClr val="15353B"/>
+                </a:solidFill>
+                <a:latin typeface="Segoe UI"/>
+              </a:rPr>
+              <a:t>10.1017/S0007123424000504.</a:t>
+            </a:r>
+          </a:p>
+        </p:txBody>
+      </p:sp>
+      <p:sp>
+        <p:nvSpPr>
+          <p:cNvPr id="13" name="Haenschen, Mann y DeMora (2026). SMS, EE"/>
+          <p:cNvSpPr txBox="1"/>
+          <p:nvPr/>
+        </p:nvSpPr>
+        <p:spPr>
+          <a:xfrm>
+            <a:off x="6355080" y="3712464"/>
+            <a:ext cx="5440680" cy="626872"/>
+          </a:xfrm>
+          <a:prstGeom prst="rect">
+            <a:avLst/>
+          </a:prstGeom>
+          <a:noFill/>
+        </p:spPr>
+        <p:txBody>
+          <a:bodyPr wrap="square" lIns="0" rIns="0" tIns="0" bIns="0">
+            <a:noAutofit/>
+          </a:bodyPr>
+          <a:lstStyle/>
+          <a:p>
+            <a:r>
+              <a:rPr sz="1600" b="0">
+                <a:solidFill>
+                  <a:srgbClr val="15353B"/>
+                </a:solidFill>
+                <a:latin typeface="Segoe UI"/>
+              </a:rPr>
+              <a:t>Haenschen, Mann y DeMora (2026). SMS, EEUU. DOI:</a:t>
+            </a:r>
+          </a:p>
+          <a:p>
+            <a:r>
+              <a:rPr sz="1600" b="0">
+                <a:solidFill>
+                  <a:srgbClr val="15353B"/>
+                </a:solidFill>
+                <a:latin typeface="Segoe UI"/>
+              </a:rPr>
+              <a:t>10.1007/s11109-026-10121-2.</a:t>
+            </a:r>
+          </a:p>
+        </p:txBody>
+      </p:sp>
+      <p:sp>
+        <p:nvSpPr>
+          <p:cNvPr id="14" name="Nickerson y Rogers (2010). Plan de voto "/>
+          <p:cNvSpPr txBox="1"/>
+          <p:nvPr/>
+        </p:nvSpPr>
+        <p:spPr>
+          <a:xfrm>
+            <a:off x="6355080" y="4507992"/>
+            <a:ext cx="5440680" cy="626872"/>
+          </a:xfrm>
+          <a:prstGeom prst="rect">
+            <a:avLst/>
+          </a:prstGeom>
+          <a:noFill/>
+        </p:spPr>
+        <p:txBody>
+          <a:bodyPr wrap="square" lIns="0" rIns="0" tIns="0" bIns="0">
+            <a:noAutofit/>
+          </a:bodyPr>
+          <a:lstStyle/>
+          <a:p>
+            <a:r>
+              <a:rPr sz="1600" b="0">
+                <a:solidFill>
+                  <a:srgbClr val="15353B"/>
+                </a:solidFill>
+                <a:latin typeface="Segoe UI"/>
+              </a:rPr>
+              <a:t>Nickerson y Rogers (2010). Plan de voto por llamada. DOI:</a:t>
+            </a:r>
+          </a:p>
+          <a:p>
+            <a:r>
+              <a:rPr sz="1600" b="0">
+                <a:solidFill>
+                  <a:srgbClr val="15353B"/>
+                </a:solidFill>
+                <a:latin typeface="Segoe UI"/>
+              </a:rPr>
+              <a:t>10.1177/0956797609359326.</a:t>
+            </a:r>
+          </a:p>
+        </p:txBody>
+      </p:sp>
+      <p:sp>
+        <p:nvSpPr>
+          <p:cNvPr id="15" name="aguas.exe (2026). Reporte Umbral, protoc"/>
+          <p:cNvSpPr txBox="1"/>
+          <p:nvPr/>
+        </p:nvSpPr>
+        <p:spPr>
+          <a:xfrm>
+            <a:off x="6355080" y="5303520"/>
+            <a:ext cx="5440680" cy="880872"/>
+          </a:xfrm>
+          <a:prstGeom prst="rect">
+            <a:avLst/>
+          </a:prstGeom>
+          <a:noFill/>
+        </p:spPr>
+        <p:txBody>
+          <a:bodyPr wrap="square" lIns="0" rIns="0" tIns="0" bIns="0">
+            <a:noAutofit/>
+          </a:bodyPr>
+          <a:lstStyle/>
+          <a:p>
+            <a:r>
+              <a:rPr sz="1600" b="0">
+                <a:solidFill>
+                  <a:srgbClr val="15353B"/>
+                </a:solidFill>
+                <a:latin typeface="Segoe UI"/>
+              </a:rPr>
+              <a:t>aguas.exe (2026). Reporte Umbral, protocolo, comparación</a:t>
+            </a:r>
+          </a:p>
+          <a:p>
+            <a:r>
+              <a:rPr sz="1600" b="0">
+                <a:solidFill>
+                  <a:srgbClr val="15353B"/>
+                </a:solidFill>
+                <a:latin typeface="Segoe UI"/>
+              </a:rPr>
+              <a:t>de modelos y planes estatales. Repositorio:</a:t>
+            </a:r>
+          </a:p>
+          <a:p>
+            <a:r>
+              <a:rPr sz="1600" b="0">
+                <a:solidFill>
+                  <a:srgbClr val="15353B"/>
+                </a:solidFill>
+                <a:latin typeface="Segoe UI"/>
+              </a:rPr>
+              <a:t>Donatelatrump/Ine_Hackaton_2026.</a:t>
+            </a:r>
+          </a:p>
+        </p:txBody>
+      </p:sp>
+      <p:sp>
+        <p:nvSpPr>
+          <p:cNvPr id="16" name="Copias de las fuentes mexicanas en Info_"/>
+          <p:cNvSpPr txBox="1"/>
+          <p:nvPr/>
+        </p:nvSpPr>
+        <p:spPr>
+          <a:xfrm>
+            <a:off x="502920" y="6419088"/>
+            <a:ext cx="11155680" cy="277622"/>
+          </a:xfrm>
+          <a:prstGeom prst="rect">
+            <a:avLst/>
+          </a:prstGeom>
+          <a:noFill/>
+        </p:spPr>
+        <p:txBody>
+          <a:bodyPr wrap="square" lIns="0" rIns="0" tIns="0" bIns="0">
+            <a:noAutofit/>
+          </a:bodyPr>
+          <a:lstStyle/>
+          <a:p>
+            <a:r>
               <a:rPr sz="1000" b="0">
                 <a:solidFill>
                   <a:srgbClr val="587177"/>
                 </a:solidFill>
                 <a:latin typeface="Segoe UI"/>
               </a:rPr>
-              <a:t>https://github.com/Donatelatrump/Ine_Hackaton_2026 · Proyección 2027 exploratoria; efecto preventivo por evaluar.</a:t>
+              <a:t>Copias de las fuentes mexicanas en Info_extra/ del ZIP. Referencias completas y rutas en las notas y en el reporte.</a:t>
             </a:r>
           </a:p>
         </p:txBody>
@@ -4834,7 +5150,7 @@
 </file>
 
 <file path=ppt/slides/slide2.xml><?xml version="1.0" encoding="utf-8"?>
-<p:sld xmlns:a="http://schemas.openxmlformats.org/drawingml/2006/main" xmlns:p="http://schemas.openxmlformats.org/presentationml/2006/main">
+<p:sld xmlns:a="http://schemas.openxmlformats.org/drawingml/2006/main" xmlns:p="http://schemas.openxmlformats.org/presentationml/2006/main" xmlns:r="http://schemas.openxmlformats.org/officeDocument/2006/relationships">
   <p:cSld>
     <p:bg>
       <p:bgPr>
@@ -4853,14 +5169,14 @@
       <p:grpSpPr/>
       <p:sp>
         <p:nvSpPr>
-          <p:cNvPr id="3" name="Texto editable"/>
+          <p:cNvPr id="3" name="El problema: decidir dónde actuar"/>
           <p:cNvSpPr txBox="1"/>
           <p:nvPr/>
         </p:nvSpPr>
         <p:spPr>
           <a:xfrm>
-            <a:off x="594360" y="320040"/>
-            <a:ext cx="10972800" cy="259080"/>
+            <a:off x="502920" y="320040"/>
+            <a:ext cx="11247120" cy="658622"/>
           </a:xfrm>
           <a:prstGeom prst="rect">
             <a:avLst/>
@@ -4869,32 +5185,32 @@
         </p:spPr>
         <p:txBody>
           <a:bodyPr wrap="square" lIns="0" rIns="0" tIns="0" bIns="0">
-            <a:spAutoFit/>
+            <a:noAutofit/>
           </a:bodyPr>
           <a:lstStyle/>
           <a:p>
             <a:r>
-              <a:rPr sz="1200" b="1">
+              <a:rPr sz="3400" b="1">
                 <a:solidFill>
                   <a:srgbClr val="10685F"/>
                 </a:solidFill>
                 <a:latin typeface="Segoe UI"/>
               </a:rPr>
-              <a:t>UMBRAL · 02</a:t>
-            </a:r>
-          </a:p>
-        </p:txBody>
-      </p:sp>
-      <p:sp>
-        <p:nvSpPr>
-          <p:cNvPr id="4" name="Texto editable"/>
+              <a:t>El problema: decidir dónde actuar</a:t>
+            </a:r>
+          </a:p>
+        </p:txBody>
+      </p:sp>
+      <p:sp>
+        <p:nvSpPr>
+          <p:cNvPr id="4" name="¿En qué municipios podría concentrarse l"/>
           <p:cNvSpPr txBox="1"/>
           <p:nvPr/>
         </p:nvSpPr>
         <p:spPr>
           <a:xfrm>
-            <a:off x="594360" y="822960"/>
-            <a:ext cx="10972800" cy="568960"/>
+            <a:off x="502920" y="1508760"/>
+            <a:ext cx="5577840" cy="1547622"/>
           </a:xfrm>
           <a:prstGeom prst="rect">
             <a:avLst/>
@@ -4903,32 +5219,54 @@
         </p:spPr>
         <p:txBody>
           <a:bodyPr wrap="square" lIns="0" rIns="0" tIns="0" bIns="0">
-            <a:spAutoFit/>
+            <a:noAutofit/>
           </a:bodyPr>
           <a:lstStyle/>
           <a:p>
             <a:r>
-              <a:rPr sz="3200" b="1">
+              <a:rPr sz="3000" b="1">
                 <a:solidFill>
                   <a:srgbClr val="15353B"/>
                 </a:solidFill>
                 <a:latin typeface="Segoe UI"/>
               </a:rPr>
-              <a:t>Consulta territorial en Umbral</a:t>
-            </a:r>
-          </a:p>
-        </p:txBody>
-      </p:sp>
-      <p:sp>
-        <p:nvSpPr>
-          <p:cNvPr id="5" name="Texto editable"/>
+              <a:t>¿En qué municipios podría</a:t>
+            </a:r>
+          </a:p>
+          <a:p>
+            <a:r>
+              <a:rPr sz="3000" b="1">
+                <a:solidFill>
+                  <a:srgbClr val="15353B"/>
+                </a:solidFill>
+                <a:latin typeface="Segoe UI"/>
+              </a:rPr>
+              <a:t>concentrarse la abstención en</a:t>
+            </a:r>
+          </a:p>
+          <a:p>
+            <a:r>
+              <a:rPr sz="3000" b="1">
+                <a:solidFill>
+                  <a:srgbClr val="15353B"/>
+                </a:solidFill>
+                <a:latin typeface="Segoe UI"/>
+              </a:rPr>
+              <a:t>2027?</a:t>
+            </a:r>
+          </a:p>
+        </p:txBody>
+      </p:sp>
+      <p:sp>
+        <p:nvSpPr>
+          <p:cNvPr id="5" name="La capacidad de atención es limitada. Ha"/>
           <p:cNvSpPr txBox="1"/>
           <p:nvPr/>
         </p:nvSpPr>
         <p:spPr>
           <a:xfrm>
-            <a:off x="594360" y="1965960"/>
-            <a:ext cx="10881360" cy="475996"/>
+            <a:off x="502920" y="3154680"/>
+            <a:ext cx="5303520" cy="1261872"/>
           </a:xfrm>
           <a:prstGeom prst="rect">
             <a:avLst/>
@@ -4937,32 +5275,134 @@
         </p:spPr>
         <p:txBody>
           <a:bodyPr wrap="square" lIns="0" rIns="0" tIns="0" bIns="0">
-            <a:spAutoFit/>
+            <a:noAutofit/>
           </a:bodyPr>
           <a:lstStyle/>
           <a:p>
             <a:r>
-              <a:rPr sz="2600" b="1">
+              <a:rPr sz="2400" b="0">
+                <a:solidFill>
+                  <a:srgbClr val="15353B"/>
+                </a:solidFill>
+                <a:latin typeface="Segoe UI"/>
+              </a:rPr>
+              <a:t>La capacidad de atención es limitada.</a:t>
+            </a:r>
+          </a:p>
+          <a:p>
+            <a:r>
+              <a:rPr sz="2400" b="0">
+                <a:solidFill>
+                  <a:srgbClr val="15353B"/>
+                </a:solidFill>
+                <a:latin typeface="Segoe UI"/>
+              </a:rPr>
+              <a:t>Hace falta elegir territorios y justificar</a:t>
+            </a:r>
+          </a:p>
+          <a:p>
+            <a:r>
+              <a:rPr sz="2400" b="0">
+                <a:solidFill>
+                  <a:srgbClr val="15353B"/>
+                </a:solidFill>
+                <a:latin typeface="Segoe UI"/>
+              </a:rPr>
+              <a:t>esa elección.</a:t>
+            </a:r>
+          </a:p>
+        </p:txBody>
+      </p:sp>
+      <p:sp>
+        <p:nvSpPr>
+          <p:cNvPr id="6" name="Umbral reúne la predicción y el contexto"/>
+          <p:cNvSpPr txBox="1"/>
+          <p:nvPr/>
+        </p:nvSpPr>
+        <p:spPr>
+          <a:xfrm>
+            <a:off x="502920" y="4709160"/>
+            <a:ext cx="5303520" cy="1261872"/>
+          </a:xfrm>
+          <a:prstGeom prst="rect">
+            <a:avLst/>
+          </a:prstGeom>
+          <a:noFill/>
+        </p:spPr>
+        <p:txBody>
+          <a:bodyPr wrap="square" lIns="0" rIns="0" tIns="0" bIns="0">
+            <a:noAutofit/>
+          </a:bodyPr>
+          <a:lstStyle/>
+          <a:p>
+            <a:r>
+              <a:rPr sz="2400" b="1">
                 <a:solidFill>
                   <a:srgbClr val="10685F"/>
                 </a:solidFill>
                 <a:latin typeface="Segoe UI"/>
               </a:rPr>
-              <a:t>Municipio, estado o país</a:t>
-            </a:r>
-          </a:p>
-        </p:txBody>
-      </p:sp>
-      <p:sp>
-        <p:nvSpPr>
-          <p:cNvPr id="6" name="Texto editable"/>
+              <a:t>Umbral reúne la predicción y el</a:t>
+            </a:r>
+          </a:p>
+          <a:p>
+            <a:r>
+              <a:rPr sz="2400" b="1">
+                <a:solidFill>
+                  <a:srgbClr val="10685F"/>
+                </a:solidFill>
+                <a:latin typeface="Segoe UI"/>
+              </a:rPr>
+              <a:t>contexto para preparar esa</a:t>
+            </a:r>
+          </a:p>
+          <a:p>
+            <a:r>
+              <a:rPr sz="2400" b="1">
+                <a:solidFill>
+                  <a:srgbClr val="10685F"/>
+                </a:solidFill>
+                <a:latin typeface="Segoe UI"/>
+              </a:rPr>
+              <a:t>decisión.</a:t>
+            </a:r>
+          </a:p>
+        </p:txBody>
+      </p:sp>
+      <p:pic>
+        <p:nvPicPr>
+          <p:cNvPr id="7" name="Captura real de Umbral"/>
+          <p:cNvPicPr>
+            <a:picLocks noChangeAspect="1"/>
+          </p:cNvPicPr>
+          <p:nvPr/>
+        </p:nvPicPr>
+        <p:blipFill>
+          <a:blip r:embed="rIdUmbral3"/>
+          <a:stretch>
+            <a:fillRect/>
+          </a:stretch>
+        </p:blipFill>
+        <p:spPr>
+          <a:xfrm>
+            <a:off x="6263640" y="1784350"/>
+            <a:ext cx="5394960" cy="3746500"/>
+          </a:xfrm>
+          <a:prstGeom prst="rect">
+            <a:avLst/>
+          </a:prstGeom>
+        </p:spPr>
+      </p:pic>
+      <p:sp>
+        <p:nvSpPr>
+          <p:cNvPr id="8" name="Umbral · aguas.exe · Reto 2"/>
           <p:cNvSpPr txBox="1"/>
           <p:nvPr/>
         </p:nvSpPr>
         <p:spPr>
           <a:xfrm>
-            <a:off x="594360" y="2569972"/>
-            <a:ext cx="10881360" cy="723900"/>
+            <a:off x="502920" y="6419088"/>
+            <a:ext cx="11155680" cy="277622"/>
           </a:xfrm>
           <a:prstGeom prst="rect">
             <a:avLst/>
@@ -4971,120 +5411,18 @@
         </p:spPr>
         <p:txBody>
           <a:bodyPr wrap="square" lIns="0" rIns="0" tIns="0" bIns="0">
-            <a:spAutoFit/>
+            <a:noAutofit/>
           </a:bodyPr>
           <a:lstStyle/>
           <a:p>
             <a:r>
-              <a:rPr sz="2100" b="0">
-                <a:solidFill>
-                  <a:srgbClr val="15353B"/>
-                </a:solidFill>
-                <a:latin typeface="Segoe UI"/>
-              </a:rPr>
-              <a:t>Un mismo año y método para el mapa, el resumen y la ficha. Los históricos muestran resultados observados y 2027 una proyección diferenciada.</a:t>
-            </a:r>
-          </a:p>
-        </p:txBody>
-      </p:sp>
-      <p:sp>
-        <p:nvSpPr>
-          <p:cNvPr id="7" name="Texto editable"/>
-          <p:cNvSpPr txBox="1"/>
-          <p:nvPr/>
-        </p:nvSpPr>
-        <p:spPr>
-          <a:xfrm>
-            <a:off x="594360" y="3421888"/>
-            <a:ext cx="10881360" cy="723900"/>
-          </a:xfrm>
-          <a:prstGeom prst="rect">
-            <a:avLst/>
-          </a:prstGeom>
-          <a:noFill/>
-        </p:spPr>
-        <p:txBody>
-          <a:bodyPr wrap="square" lIns="0" rIns="0" tIns="0" bIns="0">
-            <a:spAutoFit/>
-          </a:bodyPr>
-          <a:lstStyle/>
-          <a:p>
-            <a:r>
-              <a:rPr sz="2100" b="0">
-                <a:solidFill>
-                  <a:srgbClr val="15353B"/>
-                </a:solidFill>
-                <a:latin typeface="Segoe UI"/>
-              </a:rPr>
-              <a:t>Gráfica temporal y comparación con el promedio estatal, ponderados por personas con dato de voto.</a:t>
-            </a:r>
-          </a:p>
-        </p:txBody>
-      </p:sp>
-      <p:sp>
-        <p:nvSpPr>
-          <p:cNvPr id="8" name="Texto editable"/>
-          <p:cNvSpPr txBox="1"/>
-          <p:nvPr/>
-        </p:nvSpPr>
-        <p:spPr>
-          <a:xfrm>
-            <a:off x="594360" y="4273804"/>
-            <a:ext cx="10881360" cy="398526"/>
-          </a:xfrm>
-          <a:prstGeom prst="rect">
-            <a:avLst/>
-          </a:prstGeom>
-          <a:noFill/>
-        </p:spPr>
-        <p:txBody>
-          <a:bodyPr wrap="square" lIns="0" rIns="0" tIns="0" bIns="0">
-            <a:spAutoFit/>
-          </a:bodyPr>
-          <a:lstStyle/>
-          <a:p>
-            <a:r>
-              <a:rPr sz="2100" b="0">
-                <a:solidFill>
-                  <a:srgbClr val="15353B"/>
-                </a:solidFill>
-                <a:latin typeface="Segoe UI"/>
-              </a:rPr>
-              <a:t>La consulta completa se descarga en CSV, aunque no se configure una intervención.</a:t>
-            </a:r>
-          </a:p>
-        </p:txBody>
-      </p:sp>
-      <p:sp>
-        <p:nvSpPr>
-          <p:cNvPr id="9" name="Texto editable"/>
-          <p:cNvSpPr txBox="1"/>
-          <p:nvPr/>
-        </p:nvSpPr>
-        <p:spPr>
-          <a:xfrm>
-            <a:off x="594360" y="6245352"/>
-            <a:ext cx="10881360" cy="228092"/>
-          </a:xfrm>
-          <a:prstGeom prst="rect">
-            <a:avLst/>
-          </a:prstGeom>
-          <a:noFill/>
-        </p:spPr>
-        <p:txBody>
-          <a:bodyPr wrap="square" lIns="0" rIns="0" tIns="0" bIns="0">
-            <a:spAutoFit/>
-          </a:bodyPr>
-          <a:lstStyle/>
-          <a:p>
-            <a:r>
               <a:rPr sz="1000" b="0">
                 <a:solidFill>
                   <a:srgbClr val="587177"/>
                 </a:solidFill>
                 <a:latin typeface="Segoe UI"/>
               </a:rPr>
-              <a:t>Guía: demo/README.md. Cartografía municipal y complemento insular INEGI 2025.</a:t>
+              <a:t>Umbral · aguas.exe · Reto 2</a:t>
             </a:r>
           </a:p>
         </p:txBody>
@@ -5117,14 +5455,14 @@
       <p:grpSpPr/>
       <p:sp>
         <p:nvSpPr>
-          <p:cNvPr id="3" name="Texto editable"/>
+          <p:cNvPr id="3" name="Qué permite hacer Umbral"/>
           <p:cNvSpPr txBox="1"/>
           <p:nvPr/>
         </p:nvSpPr>
         <p:spPr>
           <a:xfrm>
-            <a:off x="594360" y="320040"/>
-            <a:ext cx="10972800" cy="259080"/>
+            <a:off x="502920" y="320040"/>
+            <a:ext cx="11247120" cy="658622"/>
           </a:xfrm>
           <a:prstGeom prst="rect">
             <a:avLst/>
@@ -5133,32 +5471,32 @@
         </p:spPr>
         <p:txBody>
           <a:bodyPr wrap="square" lIns="0" rIns="0" tIns="0" bIns="0">
-            <a:spAutoFit/>
+            <a:noAutofit/>
           </a:bodyPr>
           <a:lstStyle/>
           <a:p>
             <a:r>
-              <a:rPr sz="1200" b="1">
+              <a:rPr sz="3400" b="1">
                 <a:solidFill>
                   <a:srgbClr val="10685F"/>
                 </a:solidFill>
                 <a:latin typeface="Segoe UI"/>
               </a:rPr>
-              <a:t>UMBRAL · 03</a:t>
-            </a:r>
-          </a:p>
-        </p:txBody>
-      </p:sp>
-      <p:sp>
-        <p:nvSpPr>
-          <p:cNvPr id="4" name="Texto editable"/>
+              <a:t>Qué permite hacer Umbral</a:t>
+            </a:r>
+          </a:p>
+        </p:txBody>
+      </p:sp>
+      <p:sp>
+        <p:nvSpPr>
+          <p:cNvPr id="4" name="01  PREDECIR"/>
           <p:cNvSpPr txBox="1"/>
           <p:nvPr/>
         </p:nvSpPr>
         <p:spPr>
           <a:xfrm>
-            <a:off x="594360" y="822960"/>
-            <a:ext cx="10972800" cy="568960"/>
+            <a:off x="640080" y="1508760"/>
+            <a:ext cx="3291840" cy="499872"/>
           </a:xfrm>
           <a:prstGeom prst="rect">
             <a:avLst/>
@@ -5167,32 +5505,66 @@
         </p:spPr>
         <p:txBody>
           <a:bodyPr wrap="square" lIns="0" rIns="0" tIns="0" bIns="0">
-            <a:spAutoFit/>
+            <a:noAutofit/>
           </a:bodyPr>
           <a:lstStyle/>
           <a:p>
             <a:r>
-              <a:rPr sz="3200" b="1">
+              <a:rPr sz="2400" b="1">
+                <a:solidFill>
+                  <a:srgbClr val="10685F"/>
+                </a:solidFill>
+                <a:latin typeface="Segoe UI"/>
+              </a:rPr>
+              <a:t>01 PREDECIR</a:t>
+            </a:r>
+          </a:p>
+        </p:txBody>
+      </p:sp>
+      <p:sp>
+        <p:nvSpPr>
+          <p:cNvPr id="5" name="Estimar la abstención municipal de 2027."/>
+          <p:cNvSpPr txBox="1"/>
+          <p:nvPr/>
+        </p:nvSpPr>
+        <p:spPr>
+          <a:xfrm>
+            <a:off x="4023360" y="1508760"/>
+            <a:ext cx="7406640" cy="515747"/>
+          </a:xfrm>
+          <a:prstGeom prst="rect">
+            <a:avLst/>
+          </a:prstGeom>
+          <a:noFill/>
+        </p:spPr>
+        <p:txBody>
+          <a:bodyPr wrap="square" lIns="0" rIns="0" tIns="0" bIns="0">
+            <a:noAutofit/>
+          </a:bodyPr>
+          <a:lstStyle/>
+          <a:p>
+            <a:r>
+              <a:rPr sz="2500" b="0">
                 <a:solidFill>
                   <a:srgbClr val="15353B"/>
                 </a:solidFill>
                 <a:latin typeface="Segoe UI"/>
               </a:rPr>
-              <a:t>Cobertura y calidad visibles</a:t>
-            </a:r>
-          </a:p>
-        </p:txBody>
-      </p:sp>
-      <p:sp>
-        <p:nvSpPr>
-          <p:cNvPr id="5" name="Texto editable"/>
+              <a:t>Estimar la abstención municipal de 2027.</a:t>
+            </a:r>
+          </a:p>
+        </p:txBody>
+      </p:sp>
+      <p:sp>
+        <p:nvSpPr>
+          <p:cNvPr id="6" name="02  INFORMAR"/>
           <p:cNvSpPr txBox="1"/>
           <p:nvPr/>
         </p:nvSpPr>
         <p:spPr>
           <a:xfrm>
-            <a:off x="594360" y="1965960"/>
-            <a:ext cx="10881360" cy="630936"/>
+            <a:off x="640080" y="2587752"/>
+            <a:ext cx="3291840" cy="499872"/>
           </a:xfrm>
           <a:prstGeom prst="rect">
             <a:avLst/>
@@ -5201,32 +5573,32 @@
         </p:spPr>
         <p:txBody>
           <a:bodyPr wrap="square" lIns="0" rIns="0" tIns="0" bIns="0">
-            <a:spAutoFit/>
+            <a:noAutofit/>
           </a:bodyPr>
           <a:lstStyle/>
           <a:p>
             <a:r>
-              <a:rPr sz="3600" b="1">
+              <a:rPr sz="2400" b="1">
                 <a:solidFill>
                   <a:srgbClr val="10685F"/>
                 </a:solidFill>
                 <a:latin typeface="Segoe UI"/>
               </a:rPr>
-              <a:t>1,783 con estimación</a:t>
-            </a:r>
-          </a:p>
-        </p:txBody>
-      </p:sp>
-      <p:sp>
-        <p:nvSpPr>
-          <p:cNvPr id="6" name="Texto editable"/>
+              <a:t>02 INFORMAR</a:t>
+            </a:r>
+          </a:p>
+        </p:txBody>
+      </p:sp>
+      <p:sp>
+        <p:nvSpPr>
+          <p:cNvPr id="7" name="Consultar históricos, perfiles y fuentes"/>
           <p:cNvSpPr txBox="1"/>
           <p:nvPr/>
         </p:nvSpPr>
         <p:spPr>
           <a:xfrm>
-            <a:off x="594360" y="2724912"/>
-            <a:ext cx="10881360" cy="445008"/>
+            <a:off x="4023360" y="2587752"/>
+            <a:ext cx="7406640" cy="515747"/>
           </a:xfrm>
           <a:prstGeom prst="rect">
             <a:avLst/>
@@ -5235,32 +5607,66 @@
         </p:spPr>
         <p:txBody>
           <a:bodyPr wrap="square" lIns="0" rIns="0" tIns="0" bIns="0">
-            <a:spAutoFit/>
+            <a:noAutofit/>
           </a:bodyPr>
           <a:lstStyle/>
           <a:p>
             <a:r>
+              <a:rPr sz="2500" b="0">
+                <a:solidFill>
+                  <a:srgbClr val="15353B"/>
+                </a:solidFill>
+                <a:latin typeface="Segoe UI"/>
+              </a:rPr>
+              <a:t>Consultar históricos, perfiles y fuentes.</a:t>
+            </a:r>
+          </a:p>
+        </p:txBody>
+      </p:sp>
+      <p:sp>
+        <p:nvSpPr>
+          <p:cNvPr id="8" name="03  SIMULAR"/>
+          <p:cNvSpPr txBox="1"/>
+          <p:nvPr/>
+        </p:nvSpPr>
+        <p:spPr>
+          <a:xfrm>
+            <a:off x="640080" y="3666744"/>
+            <a:ext cx="3291840" cy="499872"/>
+          </a:xfrm>
+          <a:prstGeom prst="rect">
+            <a:avLst/>
+          </a:prstGeom>
+          <a:noFill/>
+        </p:spPr>
+        <p:txBody>
+          <a:bodyPr wrap="square" lIns="0" rIns="0" tIns="0" bIns="0">
+            <a:noAutofit/>
+          </a:bodyPr>
+          <a:lstStyle/>
+          <a:p>
+            <a:r>
               <a:rPr sz="2400" b="1">
                 <a:solidFill>
                   <a:srgbClr val="10685F"/>
                 </a:solidFill>
                 <a:latin typeface="Segoe UI"/>
               </a:rPr>
-              <a:t>694 sin estimación · 2,477 claves históricas</a:t>
-            </a:r>
-          </a:p>
-        </p:txBody>
-      </p:sp>
-      <p:sp>
-        <p:nvSpPr>
-          <p:cNvPr id="7" name="Texto editable"/>
+              <a:t>03 SIMULAR</a:t>
+            </a:r>
+          </a:p>
+        </p:txBody>
+      </p:sp>
+      <p:sp>
+        <p:nvSpPr>
+          <p:cNvPr id="9" name="Comparar escenarios sin y con una acción"/>
           <p:cNvSpPr txBox="1"/>
           <p:nvPr/>
         </p:nvSpPr>
         <p:spPr>
           <a:xfrm>
-            <a:off x="594360" y="3297936"/>
-            <a:ext cx="10881360" cy="445008"/>
+            <a:off x="4023360" y="3666744"/>
+            <a:ext cx="7406640" cy="515747"/>
           </a:xfrm>
           <a:prstGeom prst="rect">
             <a:avLst/>
@@ -5269,32 +5675,66 @@
         </p:spPr>
         <p:txBody>
           <a:bodyPr wrap="square" lIns="0" rIns="0" tIns="0" bIns="0">
-            <a:spAutoFit/>
+            <a:noAutofit/>
           </a:bodyPr>
           <a:lstStyle/>
           <a:p>
             <a:r>
+              <a:rPr sz="2500" b="0">
+                <a:solidFill>
+                  <a:srgbClr val="15353B"/>
+                </a:solidFill>
+                <a:latin typeface="Segoe UI"/>
+              </a:rPr>
+              <a:t>Comparar escenarios sin y con una acción.</a:t>
+            </a:r>
+          </a:p>
+        </p:txBody>
+      </p:sp>
+      <p:sp>
+        <p:nvSpPr>
+          <p:cNvPr id="10" name="04  PROPONER"/>
+          <p:cNvSpPr txBox="1"/>
+          <p:nvPr/>
+        </p:nvSpPr>
+        <p:spPr>
+          <a:xfrm>
+            <a:off x="640080" y="4745736"/>
+            <a:ext cx="3291840" cy="499872"/>
+          </a:xfrm>
+          <a:prstGeom prst="rect">
+            <a:avLst/>
+          </a:prstGeom>
+          <a:noFill/>
+        </p:spPr>
+        <p:txBody>
+          <a:bodyPr wrap="square" lIns="0" rIns="0" tIns="0" bIns="0">
+            <a:noAutofit/>
+          </a:bodyPr>
+          <a:lstStyle/>
+          <a:p>
+            <a:r>
               <a:rPr sz="2400" b="1">
                 <a:solidFill>
                   <a:srgbClr val="10685F"/>
                 </a:solidFill>
                 <a:latin typeface="Segoe UI"/>
               </a:rPr>
-              <a:t>Abstención observada = 100 × NV / (SV + NV)</a:t>
-            </a:r>
-          </a:p>
-        </p:txBody>
-      </p:sp>
-      <p:sp>
-        <p:nvSpPr>
-          <p:cNvPr id="8" name="Texto editable"/>
+              <a:t>04 PROPONER</a:t>
+            </a:r>
+          </a:p>
+        </p:txBody>
+      </p:sp>
+      <p:sp>
+        <p:nvSpPr>
+          <p:cNvPr id="11" name="Revisar planes adaptados al contexto est"/>
           <p:cNvSpPr txBox="1"/>
           <p:nvPr/>
         </p:nvSpPr>
         <p:spPr>
           <a:xfrm>
-            <a:off x="594360" y="3870960"/>
-            <a:ext cx="10881360" cy="692912"/>
+            <a:off x="4023360" y="4745736"/>
+            <a:ext cx="7406640" cy="515747"/>
           </a:xfrm>
           <a:prstGeom prst="rect">
             <a:avLst/>
@@ -5303,32 +5743,32 @@
         </p:spPr>
         <p:txBody>
           <a:bodyPr wrap="square" lIns="0" rIns="0" tIns="0" bIns="0">
-            <a:spAutoFit/>
+            <a:noAutofit/>
           </a:bodyPr>
           <a:lstStyle/>
           <a:p>
             <a:r>
-              <a:rPr sz="2000" b="0">
+              <a:rPr sz="2500" b="0">
                 <a:solidFill>
                   <a:srgbClr val="15353B"/>
                 </a:solidFill>
                 <a:latin typeface="Segoe UI"/>
               </a:rPr>
-              <a:t>NS identifica participación no especificada. La regla principal exige NS ≤10% en ambos antecedentes relevantes.</a:t>
-            </a:r>
-          </a:p>
-        </p:txBody>
-      </p:sp>
-      <p:sp>
-        <p:nvSpPr>
-          <p:cNvPr id="9" name="Texto editable"/>
+              <a:t>Revisar planes adaptados al contexto estatal.</a:t>
+            </a:r>
+          </a:p>
+        </p:txBody>
+      </p:sp>
+      <p:sp>
+        <p:nvSpPr>
+          <p:cNvPr id="12" name="Umbral · aguas.exe · Reto 2"/>
           <p:cNvSpPr txBox="1"/>
           <p:nvPr/>
         </p:nvSpPr>
         <p:spPr>
           <a:xfrm>
-            <a:off x="594360" y="4691888"/>
-            <a:ext cx="10881360" cy="692912"/>
+            <a:off x="502920" y="6419088"/>
+            <a:ext cx="11155680" cy="277622"/>
           </a:xfrm>
           <a:prstGeom prst="rect">
             <a:avLst/>
@@ -5337,52 +5777,18 @@
         </p:spPr>
         <p:txBody>
           <a:bodyPr wrap="square" lIns="0" rIns="0" tIns="0" bIns="0">
-            <a:spAutoFit/>
+            <a:noAutofit/>
           </a:bodyPr>
           <a:lstStyle/>
           <a:p>
             <a:r>
-              <a:rPr sz="2000" b="0">
-                <a:solidFill>
-                  <a:srgbClr val="15353B"/>
-                </a:solidFill>
-                <a:latin typeface="Segoe UI"/>
-              </a:rPr>
-              <a:t>El catálogo constante orienta la revisión territorial. Falta comprobar equivalencia de límites históricos.</a:t>
-            </a:r>
-          </a:p>
-        </p:txBody>
-      </p:sp>
-      <p:sp>
-        <p:nvSpPr>
-          <p:cNvPr id="10" name="Texto editable"/>
-          <p:cNvSpPr txBox="1"/>
-          <p:nvPr/>
-        </p:nvSpPr>
-        <p:spPr>
-          <a:xfrm>
-            <a:off x="594360" y="6245352"/>
-            <a:ext cx="10881360" cy="228092"/>
-          </a:xfrm>
-          <a:prstGeom prst="rect">
-            <a:avLst/>
-          </a:prstGeom>
-          <a:noFill/>
-        </p:spPr>
-        <p:txBody>
-          <a:bodyPr wrap="square" lIns="0" rIns="0" tIns="0" bIns="0">
-            <a:spAutoFit/>
-          </a:bodyPr>
-          <a:lstStyle/>
-          <a:p>
-            <a:r>
               <a:rPr sz="1000" b="0">
                 <a:solidFill>
                   <a:srgbClr val="587177"/>
                 </a:solidFill>
                 <a:latin typeface="Segoe UI"/>
               </a:rPr>
-              <a:t>Fuente: auditoría y base municipal del proyecto. CCPC: https://ine.mx/transparencia/datos-abiertos/visualizacion-datos/conteos-censales-participacion/</a:t>
+              <a:t>Umbral · aguas.exe · Reto 2</a:t>
             </a:r>
           </a:p>
         </p:txBody>
@@ -5415,14 +5821,14 @@
       <p:grpSpPr/>
       <p:sp>
         <p:nvSpPr>
-          <p:cNvPr id="3" name="Texto editable"/>
+          <p:cNvPr id="3" name="Cómo predice la abstención de 2027"/>
           <p:cNvSpPr txBox="1"/>
           <p:nvPr/>
         </p:nvSpPr>
         <p:spPr>
           <a:xfrm>
-            <a:off x="594360" y="320040"/>
-            <a:ext cx="10972800" cy="259080"/>
+            <a:off x="502920" y="320040"/>
+            <a:ext cx="11247120" cy="658622"/>
           </a:xfrm>
           <a:prstGeom prst="rect">
             <a:avLst/>
@@ -5431,32 +5837,32 @@
         </p:spPr>
         <p:txBody>
           <a:bodyPr wrap="square" lIns="0" rIns="0" tIns="0" bIns="0">
-            <a:spAutoFit/>
+            <a:noAutofit/>
           </a:bodyPr>
           <a:lstStyle/>
           <a:p>
             <a:r>
-              <a:rPr sz="1200" b="1">
+              <a:rPr sz="3400" b="1">
                 <a:solidFill>
                   <a:srgbClr val="10685F"/>
                 </a:solidFill>
                 <a:latin typeface="Segoe UI"/>
               </a:rPr>
-              <a:t>UMBRAL · 04</a:t>
-            </a:r>
-          </a:p>
-        </p:txBody>
-      </p:sp>
-      <p:sp>
-        <p:nvSpPr>
-          <p:cNvPr id="4" name="Texto editable"/>
+              <a:t>Cómo predice la abstención de 2027</a:t>
+            </a:r>
+          </a:p>
+        </p:txBody>
+      </p:sp>
+      <p:sp>
+        <p:nvSpPr>
+          <p:cNvPr id="4" name="2009–2024"/>
           <p:cNvSpPr txBox="1"/>
           <p:nvPr/>
         </p:nvSpPr>
         <p:spPr>
           <a:xfrm>
-            <a:off x="594360" y="822960"/>
-            <a:ext cx="10972800" cy="568960"/>
+            <a:off x="594360" y="1508760"/>
+            <a:ext cx="3200400" cy="626872"/>
           </a:xfrm>
           <a:prstGeom prst="rect">
             <a:avLst/>
@@ -5465,32 +5871,66 @@
         </p:spPr>
         <p:txBody>
           <a:bodyPr wrap="square" lIns="0" rIns="0" tIns="0" bIns="0">
-            <a:spAutoFit/>
+            <a:noAutofit/>
           </a:bodyPr>
           <a:lstStyle/>
           <a:p>
             <a:r>
               <a:rPr sz="3200" b="1">
                 <a:solidFill>
+                  <a:srgbClr val="10685F"/>
+                </a:solidFill>
+                <a:latin typeface="Segoe UI"/>
+              </a:rPr>
+              <a:t>2009–2024</a:t>
+            </a:r>
+          </a:p>
+        </p:txBody>
+      </p:sp>
+      <p:sp>
+        <p:nvSpPr>
+          <p:cNvPr id="5" name="Historia electoral del INE"/>
+          <p:cNvSpPr txBox="1"/>
+          <p:nvPr/>
+        </p:nvSpPr>
+        <p:spPr>
+          <a:xfrm>
+            <a:off x="594360" y="2240280"/>
+            <a:ext cx="3200400" cy="468122"/>
+          </a:xfrm>
+          <a:prstGeom prst="rect">
+            <a:avLst/>
+          </a:prstGeom>
+          <a:noFill/>
+        </p:spPr>
+        <p:txBody>
+          <a:bodyPr wrap="square" lIns="0" rIns="0" tIns="0" bIns="0">
+            <a:noAutofit/>
+          </a:bodyPr>
+          <a:lstStyle/>
+          <a:p>
+            <a:r>
+              <a:rPr sz="2200" b="0">
+                <a:solidFill>
                   <a:srgbClr val="15353B"/>
                 </a:solidFill>
                 <a:latin typeface="Segoe UI"/>
               </a:rPr>
-              <a:t>Cuatro modelos, una comparación temporal</a:t>
-            </a:r>
-          </a:p>
-        </p:txBody>
-      </p:sp>
-      <p:sp>
-        <p:nvSpPr>
-          <p:cNvPr id="5" name="Texto editable"/>
+              <a:t>Historia electoral del INE</a:t>
+            </a:r>
+          </a:p>
+        </p:txBody>
+      </p:sp>
+      <p:sp>
+        <p:nvSpPr>
+          <p:cNvPr id="6" name="15 variables"/>
           <p:cNvSpPr txBox="1"/>
           <p:nvPr/>
         </p:nvSpPr>
         <p:spPr>
           <a:xfrm>
-            <a:off x="594360" y="1965960"/>
-            <a:ext cx="10881360" cy="460502"/>
+            <a:off x="4480560" y="1508760"/>
+            <a:ext cx="3200400" cy="626872"/>
           </a:xfrm>
           <a:prstGeom prst="rect">
             <a:avLst/>
@@ -5499,32 +5939,179 @@
         </p:spPr>
         <p:txBody>
           <a:bodyPr wrap="square" lIns="0" rIns="0" tIns="0" bIns="0">
-            <a:spAutoFit/>
+            <a:noAutofit/>
           </a:bodyPr>
           <a:lstStyle/>
           <a:p>
             <a:r>
+              <a:rPr sz="3200" b="1">
+                <a:solidFill>
+                  <a:srgbClr val="10685F"/>
+                </a:solidFill>
+                <a:latin typeface="Segoe UI"/>
+              </a:rPr>
+              <a:t>15 variables</a:t>
+            </a:r>
+          </a:p>
+        </p:txBody>
+      </p:sp>
+      <p:sp>
+        <p:nvSpPr>
+          <p:cNvPr id="7" name="Abstención, edad, urbanización y calidad"/>
+          <p:cNvSpPr txBox="1"/>
+          <p:nvPr/>
+        </p:nvSpPr>
+        <p:spPr>
+          <a:xfrm>
+            <a:off x="4480560" y="2240280"/>
+            <a:ext cx="3200400" cy="817372"/>
+          </a:xfrm>
+          <a:prstGeom prst="rect">
+            <a:avLst/>
+          </a:prstGeom>
+          <a:noFill/>
+        </p:spPr>
+        <p:txBody>
+          <a:bodyPr wrap="square" lIns="0" rIns="0" tIns="0" bIns="0">
+            <a:noAutofit/>
+          </a:bodyPr>
+          <a:lstStyle/>
+          <a:p>
+            <a:r>
+              <a:rPr sz="2200" b="0">
+                <a:solidFill>
+                  <a:srgbClr val="15353B"/>
+                </a:solidFill>
+                <a:latin typeface="Segoe UI"/>
+              </a:rPr>
+              <a:t>Abstención, edad,</a:t>
+            </a:r>
+          </a:p>
+          <a:p>
+            <a:r>
+              <a:rPr sz="2200" b="0">
+                <a:solidFill>
+                  <a:srgbClr val="15353B"/>
+                </a:solidFill>
+                <a:latin typeface="Segoe UI"/>
+              </a:rPr>
+              <a:t>urbanización y calidad</a:t>
+            </a:r>
+          </a:p>
+        </p:txBody>
+      </p:sp>
+      <p:sp>
+        <p:nvSpPr>
+          <p:cNvPr id="8" name="2027"/>
+          <p:cNvSpPr txBox="1"/>
+          <p:nvPr/>
+        </p:nvSpPr>
+        <p:spPr>
+          <a:xfrm>
+            <a:off x="8366760" y="1508760"/>
+            <a:ext cx="3200400" cy="626872"/>
+          </a:xfrm>
+          <a:prstGeom prst="rect">
+            <a:avLst/>
+          </a:prstGeom>
+          <a:noFill/>
+        </p:spPr>
+        <p:txBody>
+          <a:bodyPr wrap="square" lIns="0" rIns="0" tIns="0" bIns="0">
+            <a:noAutofit/>
+          </a:bodyPr>
+          <a:lstStyle/>
+          <a:p>
+            <a:r>
+              <a:rPr sz="3200" b="1">
+                <a:solidFill>
+                  <a:srgbClr val="10685F"/>
+                </a:solidFill>
+                <a:latin typeface="Segoe UI"/>
+              </a:rPr>
+              <a:t>2027</a:t>
+            </a:r>
+          </a:p>
+        </p:txBody>
+      </p:sp>
+      <p:sp>
+        <p:nvSpPr>
+          <p:cNvPr id="9" name="Predicción municipal"/>
+          <p:cNvSpPr txBox="1"/>
+          <p:nvPr/>
+        </p:nvSpPr>
+        <p:spPr>
+          <a:xfrm>
+            <a:off x="8366760" y="2240280"/>
+            <a:ext cx="3200400" cy="468122"/>
+          </a:xfrm>
+          <a:prstGeom prst="rect">
+            <a:avLst/>
+          </a:prstGeom>
+          <a:noFill/>
+        </p:spPr>
+        <p:txBody>
+          <a:bodyPr wrap="square" lIns="0" rIns="0" tIns="0" bIns="0">
+            <a:noAutofit/>
+          </a:bodyPr>
+          <a:lstStyle/>
+          <a:p>
+            <a:r>
+              <a:rPr sz="2200" b="0">
+                <a:solidFill>
+                  <a:srgbClr val="15353B"/>
+                </a:solidFill>
+                <a:latin typeface="Segoe UI"/>
+              </a:rPr>
+              <a:t>Predicción municipal</a:t>
+            </a:r>
+          </a:p>
+        </p:txBody>
+      </p:sp>
+      <p:sp>
+        <p:nvSpPr>
+          <p:cNvPr id="10" name="Se comparan cuatro modelos; se seleccion"/>
+          <p:cNvSpPr txBox="1"/>
+          <p:nvPr/>
+        </p:nvSpPr>
+        <p:spPr>
+          <a:xfrm>
+            <a:off x="594360" y="3840480"/>
+            <a:ext cx="10881360" cy="515747"/>
+          </a:xfrm>
+          <a:prstGeom prst="rect">
+            <a:avLst/>
+          </a:prstGeom>
+          <a:noFill/>
+        </p:spPr>
+        <p:txBody>
+          <a:bodyPr wrap="square" lIns="0" rIns="0" tIns="0" bIns="0">
+            <a:noAutofit/>
+          </a:bodyPr>
+          <a:lstStyle/>
+          <a:p>
+            <a:r>
               <a:rPr sz="2500" b="1">
                 <a:solidFill>
-                  <a:srgbClr val="10685F"/>
-                </a:solidFill>
-                <a:latin typeface="Segoe UI"/>
-              </a:rPr>
-              <a:t>Misma cohorte y 15 variables históricas</a:t>
-            </a:r>
-          </a:p>
-        </p:txBody>
-      </p:sp>
-      <p:sp>
-        <p:nvSpPr>
-          <p:cNvPr id="6" name="Texto editable"/>
+                  <a:srgbClr val="15353B"/>
+                </a:solidFill>
+                <a:latin typeface="Segoe UI"/>
+              </a:rPr>
+              <a:t>Se comparan cuatro modelos; se selecciona HistGradientBoosting.</a:t>
+            </a:r>
+          </a:p>
+        </p:txBody>
+      </p:sp>
+      <p:sp>
+        <p:nvSpPr>
+          <p:cNvPr id="11" name="1,783 municipios con estimación. Otros 6"/>
           <p:cNvSpPr txBox="1"/>
           <p:nvPr/>
         </p:nvSpPr>
         <p:spPr>
           <a:xfrm>
-            <a:off x="594360" y="2554478"/>
-            <a:ext cx="10881360" cy="723900"/>
+            <a:off x="594360" y="4754880"/>
+            <a:ext cx="10881360" cy="880872"/>
           </a:xfrm>
           <a:prstGeom prst="rect">
             <a:avLst/>
@@ -5533,32 +6120,43 @@
         </p:spPr>
         <p:txBody>
           <a:bodyPr wrap="square" lIns="0" rIns="0" tIns="0" bIns="0">
-            <a:spAutoFit/>
+            <a:noAutofit/>
           </a:bodyPr>
           <a:lstStyle/>
           <a:p>
             <a:r>
-              <a:rPr sz="2100" b="0">
+              <a:rPr sz="2400" b="0">
                 <a:solidFill>
                   <a:srgbClr val="15353B"/>
                 </a:solidFill>
                 <a:latin typeface="Segoe UI"/>
               </a:rPr>
-              <a:t>Ridge, HistGradientBoosting, LightGBM y CatBoost aprenden el residual respecto a la referencia homóloga.</a:t>
-            </a:r>
-          </a:p>
-        </p:txBody>
-      </p:sp>
-      <p:sp>
-        <p:nvSpPr>
-          <p:cNvPr id="7" name="Texto editable"/>
+              <a:t>1,783 municipios con estimación. Otros 694 quedan sin estimación por</a:t>
+            </a:r>
+          </a:p>
+          <a:p>
+            <a:r>
+              <a:rPr sz="2400" b="0">
+                <a:solidFill>
+                  <a:srgbClr val="15353B"/>
+                </a:solidFill>
+                <a:latin typeface="Segoe UI"/>
+              </a:rPr>
+              <a:t>información insuficiente.</a:t>
+            </a:r>
+          </a:p>
+        </p:txBody>
+      </p:sp>
+      <p:sp>
+        <p:nvSpPr>
+          <p:cNvPr id="12" name="Fuente: CCPC 2009–2024 y comparación de "/>
           <p:cNvSpPr txBox="1"/>
           <p:nvPr/>
         </p:nvSpPr>
         <p:spPr>
           <a:xfrm>
-            <a:off x="594360" y="3406394"/>
-            <a:ext cx="10881360" cy="723900"/>
+            <a:off x="502920" y="6419088"/>
+            <a:ext cx="11155680" cy="277622"/>
           </a:xfrm>
           <a:prstGeom prst="rect">
             <a:avLst/>
@@ -5567,86 +6165,18 @@
         </p:spPr>
         <p:txBody>
           <a:bodyPr wrap="square" lIns="0" rIns="0" tIns="0" bIns="0">
-            <a:spAutoFit/>
+            <a:noAutofit/>
           </a:bodyPr>
           <a:lstStyle/>
           <a:p>
             <a:r>
-              <a:rPr sz="2100" b="0">
-                <a:solidFill>
-                  <a:srgbClr val="15353B"/>
-                </a:solidFill>
-                <a:latin typeface="Segoe UI"/>
-              </a:rPr>
-              <a:t>Los parámetros se eligen con años anteriores al corte evaluado. Sin parada temprana sobre 2021 o 2024.</a:t>
-            </a:r>
-          </a:p>
-        </p:txBody>
-      </p:sp>
-      <p:sp>
-        <p:nvSpPr>
-          <p:cNvPr id="8" name="Texto editable"/>
-          <p:cNvSpPr txBox="1"/>
-          <p:nvPr/>
-        </p:nvSpPr>
-        <p:spPr>
-          <a:xfrm>
-            <a:off x="594360" y="4258310"/>
-            <a:ext cx="10881360" cy="398526"/>
-          </a:xfrm>
-          <a:prstGeom prst="rect">
-            <a:avLst/>
-          </a:prstGeom>
-          <a:noFill/>
-        </p:spPr>
-        <p:txBody>
-          <a:bodyPr wrap="square" lIns="0" rIns="0" tIns="0" bIns="0">
-            <a:spAutoFit/>
-          </a:bodyPr>
-          <a:lstStyle/>
-          <a:p>
-            <a:r>
-              <a:rPr sz="2100" b="0">
-                <a:solidFill>
-                  <a:srgbClr val="15353B"/>
-                </a:solidFill>
-                <a:latin typeface="Segoe UI"/>
-              </a:rPr>
-              <a:t>Protocolo previo, cuatro configuraciones por familia, semilla 42 y un hilo de CPU.</a:t>
-            </a:r>
-          </a:p>
-        </p:txBody>
-      </p:sp>
-      <p:sp>
-        <p:nvSpPr>
-          <p:cNvPr id="9" name="Texto editable"/>
-          <p:cNvSpPr txBox="1"/>
-          <p:nvPr/>
-        </p:nvSpPr>
-        <p:spPr>
-          <a:xfrm>
-            <a:off x="594360" y="6245352"/>
-            <a:ext cx="10881360" cy="228092"/>
-          </a:xfrm>
-          <a:prstGeom prst="rect">
-            <a:avLst/>
-          </a:prstGeom>
-          <a:noFill/>
-        </p:spPr>
-        <p:txBody>
-          <a:bodyPr wrap="square" lIns="0" rIns="0" tIns="0" bIns="0">
-            <a:spAutoFit/>
-          </a:bodyPr>
-          <a:lstStyle/>
-          <a:p>
-            <a:r>
               <a:rPr sz="1000" b="0">
                 <a:solidFill>
                   <a:srgbClr val="587177"/>
                 </a:solidFill>
                 <a:latin typeface="Segoe UI"/>
               </a:rPr>
-              <a:t>Fuente: modelado/PROTOCOLO_COMPARACION_4_MODELOS.md y salidas/comparacion_modelos/resultados.json.</a:t>
+              <a:t>Fuente: CCPC 2009–2024 y comparación de cuatro modelos. Datos agregados, sin información personal.</a:t>
             </a:r>
           </a:p>
         </p:txBody>
@@ -5679,14 +6209,14 @@
       <p:grpSpPr/>
       <p:sp>
         <p:nvSpPr>
-          <p:cNvPr id="3" name="Texto editable"/>
+          <p:cNvPr id="3" name="Qué tan bien predice"/>
           <p:cNvSpPr txBox="1"/>
           <p:nvPr/>
         </p:nvSpPr>
         <p:spPr>
           <a:xfrm>
-            <a:off x="594360" y="320040"/>
-            <a:ext cx="10972800" cy="259080"/>
+            <a:off x="502920" y="320040"/>
+            <a:ext cx="11247120" cy="658622"/>
           </a:xfrm>
           <a:prstGeom prst="rect">
             <a:avLst/>
@@ -5695,32 +6225,32 @@
         </p:spPr>
         <p:txBody>
           <a:bodyPr wrap="square" lIns="0" rIns="0" tIns="0" bIns="0">
-            <a:spAutoFit/>
+            <a:noAutofit/>
           </a:bodyPr>
           <a:lstStyle/>
           <a:p>
             <a:r>
-              <a:rPr sz="1200" b="1">
+              <a:rPr sz="3400" b="1">
                 <a:solidFill>
                   <a:srgbClr val="10685F"/>
                 </a:solidFill>
                 <a:latin typeface="Segoe UI"/>
               </a:rPr>
-              <a:t>UMBRAL · 05</a:t>
-            </a:r>
-          </a:p>
-        </p:txBody>
-      </p:sp>
-      <p:sp>
-        <p:nvSpPr>
-          <p:cNvPr id="4" name="Texto editable"/>
+              <a:t>Qué tan bien predice</a:t>
+            </a:r>
+          </a:p>
+        </p:txBody>
+      </p:sp>
+      <p:sp>
+        <p:nvSpPr>
+          <p:cNvPr id="4" name="6.84 pp"/>
           <p:cNvSpPr txBox="1"/>
           <p:nvPr/>
         </p:nvSpPr>
         <p:spPr>
           <a:xfrm>
-            <a:off x="594360" y="822960"/>
-            <a:ext cx="10972800" cy="568960"/>
+            <a:off x="640080" y="1508760"/>
+            <a:ext cx="4846320" cy="1071372"/>
           </a:xfrm>
           <a:prstGeom prst="rect">
             <a:avLst/>
@@ -5729,671 +6259,77 @@
         </p:spPr>
         <p:txBody>
           <a:bodyPr wrap="square" lIns="0" rIns="0" tIns="0" bIns="0">
-            <a:spAutoFit/>
+            <a:noAutofit/>
           </a:bodyPr>
           <a:lstStyle/>
           <a:p>
             <a:r>
-              <a:rPr sz="3200" b="1">
+              <a:rPr sz="6000" b="1">
+                <a:solidFill>
+                  <a:srgbClr val="10685F"/>
+                </a:solidFill>
+                <a:latin typeface="Segoe UI"/>
+              </a:rPr>
+              <a:t>6.84 pp</a:t>
+            </a:r>
+          </a:p>
+        </p:txBody>
+      </p:sp>
+      <p:sp>
+        <p:nvSpPr>
+          <p:cNvPr id="5" name="Error absoluto medio del modelo en las e"/>
+          <p:cNvSpPr txBox="1"/>
+          <p:nvPr/>
+        </p:nvSpPr>
+        <p:spPr>
+          <a:xfrm>
+            <a:off x="640080" y="2834640"/>
+            <a:ext cx="4937760" cy="880872"/>
+          </a:xfrm>
+          <a:prstGeom prst="rect">
+            <a:avLst/>
+          </a:prstGeom>
+          <a:noFill/>
+        </p:spPr>
+        <p:txBody>
+          <a:bodyPr wrap="square" lIns="0" rIns="0" tIns="0" bIns="0">
+            <a:noAutofit/>
+          </a:bodyPr>
+          <a:lstStyle/>
+          <a:p>
+            <a:r>
+              <a:rPr sz="2400" b="0">
                 <a:solidFill>
                   <a:srgbClr val="15353B"/>
                 </a:solidFill>
                 <a:latin typeface="Segoe UI"/>
               </a:rPr>
-              <a:t>HistGradientBoosting seleccionado</a:t>
-            </a:r>
-          </a:p>
-        </p:txBody>
-      </p:sp>
-      <p:graphicFrame>
-        <p:nvGraphicFramePr>
-          <p:cNvPr id="5" name="Table 3"/>
-          <p:cNvGraphicFramePr>
-            <a:graphicFrameLocks noGrp="1"/>
-          </p:cNvGraphicFramePr>
-          <p:nvPr/>
-        </p:nvGraphicFramePr>
-        <p:xfrm>
-          <a:off x="594360" y="1828800"/>
-          <a:ext cx="10972800" cy="2377440"/>
-        </p:xfrm>
-        <a:graphic>
-          <a:graphicData uri="http://schemas.openxmlformats.org/drawingml/2006/table">
-            <a:tbl>
-              <a:tblPr firstRow="1" bandRow="1">
-                <a:tableStyleId>{5C22544A-7EE6-4342-B048-85BDC9FD1C3A}</a:tableStyleId>
-              </a:tblPr>
-              <a:tblGrid>
-                <a:gridCol w="3657600"/>
-                <a:gridCol w="1828800"/>
-                <a:gridCol w="1828800"/>
-                <a:gridCol w="1828800"/>
-                <a:gridCol w="1828800"/>
-              </a:tblGrid>
-              <a:tr h="475488">
-                <a:tc>
-                  <a:txBody>
-                    <a:bodyPr/>
-                    <a:lstStyle/>
-                    <a:p>
-                      <a:pPr>
-                        <a:defRPr sz="2000" b="1">
-                          <a:solidFill>
-                            <a:srgbClr val="15353B"/>
-                          </a:solidFill>
-                          <a:latin typeface="Segoe UI"/>
-                        </a:defRPr>
-                      </a:pPr>
-                      <a:r>
-                        <a:t>Modelo</a:t>
-                      </a:r>
-                    </a:p>
-                  </a:txBody>
-                  <a:tcPr>
-                    <a:solidFill>
-                      <a:srgbClr val="E5EEEA"/>
-                    </a:solidFill>
-                  </a:tcPr>
-                </a:tc>
-                <a:tc>
-                  <a:txBody>
-                    <a:bodyPr/>
-                    <a:lstStyle/>
-                    <a:p>
-                      <a:pPr>
-                        <a:defRPr sz="2000" b="1">
-                          <a:solidFill>
-                            <a:srgbClr val="15353B"/>
-                          </a:solidFill>
-                          <a:latin typeface="Segoe UI"/>
-                        </a:defRPr>
-                      </a:pPr>
-                      <a:r>
-                        <a:t>MAE medio</a:t>
-                      </a:r>
-                    </a:p>
-                  </a:txBody>
-                  <a:tcPr>
-                    <a:solidFill>
-                      <a:srgbClr val="E5EEEA"/>
-                    </a:solidFill>
-                  </a:tcPr>
-                </a:tc>
-                <a:tc>
-                  <a:txBody>
-                    <a:bodyPr/>
-                    <a:lstStyle/>
-                    <a:p>
-                      <a:pPr>
-                        <a:defRPr sz="2000" b="1">
-                          <a:solidFill>
-                            <a:srgbClr val="15353B"/>
-                          </a:solidFill>
-                          <a:latin typeface="Segoe UI"/>
-                        </a:defRPr>
-                      </a:pPr>
-                      <a:r>
-                        <a:t>Ponderado</a:t>
-                      </a:r>
-                    </a:p>
-                  </a:txBody>
-                  <a:tcPr>
-                    <a:solidFill>
-                      <a:srgbClr val="E5EEEA"/>
-                    </a:solidFill>
-                  </a:tcPr>
-                </a:tc>
-                <a:tc>
-                  <a:txBody>
-                    <a:bodyPr/>
-                    <a:lstStyle/>
-                    <a:p>
-                      <a:pPr>
-                        <a:defRPr sz="2000" b="1">
-                          <a:solidFill>
-                            <a:srgbClr val="15353B"/>
-                          </a:solidFill>
-                          <a:latin typeface="Segoe UI"/>
-                        </a:defRPr>
-                      </a:pPr>
-                      <a:r>
-                        <a:t>Top50 medio</a:t>
-                      </a:r>
-                    </a:p>
-                  </a:txBody>
-                  <a:tcPr>
-                    <a:solidFill>
-                      <a:srgbClr val="E5EEEA"/>
-                    </a:solidFill>
-                  </a:tcPr>
-                </a:tc>
-                <a:tc>
-                  <a:txBody>
-                    <a:bodyPr/>
-                    <a:lstStyle/>
-                    <a:p>
-                      <a:pPr>
-                        <a:defRPr sz="2000" b="1">
-                          <a:solidFill>
-                            <a:srgbClr val="15353B"/>
-                          </a:solidFill>
-                          <a:latin typeface="Segoe UI"/>
-                        </a:defRPr>
-                      </a:pPr>
-                      <a:r>
-                        <a:t>Ajustar ms</a:t>
-                      </a:r>
-                    </a:p>
-                  </a:txBody>
-                  <a:tcPr>
-                    <a:solidFill>
-                      <a:srgbClr val="E5EEEA"/>
-                    </a:solidFill>
-                  </a:tcPr>
-                </a:tc>
-              </a:tr>
-              <a:tr h="475488">
-                <a:tc>
-                  <a:txBody>
-                    <a:bodyPr/>
-                    <a:lstStyle/>
-                    <a:p>
-                      <a:pPr>
-                        <a:defRPr sz="2000" b="0">
-                          <a:solidFill>
-                            <a:srgbClr val="15353B"/>
-                          </a:solidFill>
-                          <a:latin typeface="Segoe UI"/>
-                        </a:defRPr>
-                      </a:pPr>
-                      <a:r>
-                        <a:t>HistGradientBoosting</a:t>
-                      </a:r>
-                    </a:p>
-                  </a:txBody>
-                  <a:tcPr>
-                    <a:solidFill>
-                      <a:srgbClr val="F3F6F4"/>
-                    </a:solidFill>
-                  </a:tcPr>
-                </a:tc>
-                <a:tc>
-                  <a:txBody>
-                    <a:bodyPr/>
-                    <a:lstStyle/>
-                    <a:p>
-                      <a:pPr>
-                        <a:defRPr sz="2000" b="0">
-                          <a:solidFill>
-                            <a:srgbClr val="15353B"/>
-                          </a:solidFill>
-                          <a:latin typeface="Segoe UI"/>
-                        </a:defRPr>
-                      </a:pPr>
-                      <a:r>
-                        <a:t>6.84</a:t>
-                      </a:r>
-                    </a:p>
-                  </a:txBody>
-                  <a:tcPr>
-                    <a:solidFill>
-                      <a:srgbClr val="F3F6F4"/>
-                    </a:solidFill>
-                  </a:tcPr>
-                </a:tc>
-                <a:tc>
-                  <a:txBody>
-                    <a:bodyPr/>
-                    <a:lstStyle/>
-                    <a:p>
-                      <a:pPr>
-                        <a:defRPr sz="2000" b="0">
-                          <a:solidFill>
-                            <a:srgbClr val="15353B"/>
-                          </a:solidFill>
-                          <a:latin typeface="Segoe UI"/>
-                        </a:defRPr>
-                      </a:pPr>
-                      <a:r>
-                        <a:t>4.67</a:t>
-                      </a:r>
-                    </a:p>
-                  </a:txBody>
-                  <a:tcPr>
-                    <a:solidFill>
-                      <a:srgbClr val="F3F6F4"/>
-                    </a:solidFill>
-                  </a:tcPr>
-                </a:tc>
-                <a:tc>
-                  <a:txBody>
-                    <a:bodyPr/>
-                    <a:lstStyle/>
-                    <a:p>
-                      <a:pPr>
-                        <a:defRPr sz="2000" b="0">
-                          <a:solidFill>
-                            <a:srgbClr val="15353B"/>
-                          </a:solidFill>
-                          <a:latin typeface="Segoe UI"/>
-                        </a:defRPr>
-                      </a:pPr>
-                      <a:r>
-                        <a:t>20.0/50</a:t>
-                      </a:r>
-                    </a:p>
-                  </a:txBody>
-                  <a:tcPr>
-                    <a:solidFill>
-                      <a:srgbClr val="F3F6F4"/>
-                    </a:solidFill>
-                  </a:tcPr>
-                </a:tc>
-                <a:tc>
-                  <a:txBody>
-                    <a:bodyPr/>
-                    <a:lstStyle/>
-                    <a:p>
-                      <a:pPr>
-                        <a:defRPr sz="2000" b="0">
-                          <a:solidFill>
-                            <a:srgbClr val="15353B"/>
-                          </a:solidFill>
-                          <a:latin typeface="Segoe UI"/>
-                        </a:defRPr>
-                      </a:pPr>
-                      <a:r>
-                        <a:t>199.6</a:t>
-                      </a:r>
-                    </a:p>
-                  </a:txBody>
-                  <a:tcPr>
-                    <a:solidFill>
-                      <a:srgbClr val="F3F6F4"/>
-                    </a:solidFill>
-                  </a:tcPr>
-                </a:tc>
-              </a:tr>
-              <a:tr h="475488">
-                <a:tc>
-                  <a:txBody>
-                    <a:bodyPr/>
-                    <a:lstStyle/>
-                    <a:p>
-                      <a:pPr>
-                        <a:defRPr sz="2000" b="0">
-                          <a:solidFill>
-                            <a:srgbClr val="15353B"/>
-                          </a:solidFill>
-                          <a:latin typeface="Segoe UI"/>
-                        </a:defRPr>
-                      </a:pPr>
-                      <a:r>
-                        <a:t>LightGBM</a:t>
-                      </a:r>
-                    </a:p>
-                  </a:txBody>
-                  <a:tcPr>
-                    <a:solidFill>
-                      <a:srgbClr val="F3F6F4"/>
-                    </a:solidFill>
-                  </a:tcPr>
-                </a:tc>
-                <a:tc>
-                  <a:txBody>
-                    <a:bodyPr/>
-                    <a:lstStyle/>
-                    <a:p>
-                      <a:pPr>
-                        <a:defRPr sz="2000" b="0">
-                          <a:solidFill>
-                            <a:srgbClr val="15353B"/>
-                          </a:solidFill>
-                          <a:latin typeface="Segoe UI"/>
-                        </a:defRPr>
-                      </a:pPr>
-                      <a:r>
-                        <a:t>6.83</a:t>
-                      </a:r>
-                    </a:p>
-                  </a:txBody>
-                  <a:tcPr>
-                    <a:solidFill>
-                      <a:srgbClr val="F3F6F4"/>
-                    </a:solidFill>
-                  </a:tcPr>
-                </a:tc>
-                <a:tc>
-                  <a:txBody>
-                    <a:bodyPr/>
-                    <a:lstStyle/>
-                    <a:p>
-                      <a:pPr>
-                        <a:defRPr sz="2000" b="0">
-                          <a:solidFill>
-                            <a:srgbClr val="15353B"/>
-                          </a:solidFill>
-                          <a:latin typeface="Segoe UI"/>
-                        </a:defRPr>
-                      </a:pPr>
-                      <a:r>
-                        <a:t>4.84</a:t>
-                      </a:r>
-                    </a:p>
-                  </a:txBody>
-                  <a:tcPr>
-                    <a:solidFill>
-                      <a:srgbClr val="F3F6F4"/>
-                    </a:solidFill>
-                  </a:tcPr>
-                </a:tc>
-                <a:tc>
-                  <a:txBody>
-                    <a:bodyPr/>
-                    <a:lstStyle/>
-                    <a:p>
-                      <a:pPr>
-                        <a:defRPr sz="2000" b="0">
-                          <a:solidFill>
-                            <a:srgbClr val="15353B"/>
-                          </a:solidFill>
-                          <a:latin typeface="Segoe UI"/>
-                        </a:defRPr>
-                      </a:pPr>
-                      <a:r>
-                        <a:t>21.0/50</a:t>
-                      </a:r>
-                    </a:p>
-                  </a:txBody>
-                  <a:tcPr>
-                    <a:solidFill>
-                      <a:srgbClr val="F3F6F4"/>
-                    </a:solidFill>
-                  </a:tcPr>
-                </a:tc>
-                <a:tc>
-                  <a:txBody>
-                    <a:bodyPr/>
-                    <a:lstStyle/>
-                    <a:p>
-                      <a:pPr>
-                        <a:defRPr sz="2000" b="0">
-                          <a:solidFill>
-                            <a:srgbClr val="15353B"/>
-                          </a:solidFill>
-                          <a:latin typeface="Segoe UI"/>
-                        </a:defRPr>
-                      </a:pPr>
-                      <a:r>
-                        <a:t>126.6</a:t>
-                      </a:r>
-                    </a:p>
-                  </a:txBody>
-                  <a:tcPr>
-                    <a:solidFill>
-                      <a:srgbClr val="F3F6F4"/>
-                    </a:solidFill>
-                  </a:tcPr>
-                </a:tc>
-              </a:tr>
-              <a:tr h="475488">
-                <a:tc>
-                  <a:txBody>
-                    <a:bodyPr/>
-                    <a:lstStyle/>
-                    <a:p>
-                      <a:pPr>
-                        <a:defRPr sz="2000" b="0">
-                          <a:solidFill>
-                            <a:srgbClr val="15353B"/>
-                          </a:solidFill>
-                          <a:latin typeface="Segoe UI"/>
-                        </a:defRPr>
-                      </a:pPr>
-                      <a:r>
-                        <a:t>CatBoost</a:t>
-                      </a:r>
-                    </a:p>
-                  </a:txBody>
-                  <a:tcPr>
-                    <a:solidFill>
-                      <a:srgbClr val="F3F6F4"/>
-                    </a:solidFill>
-                  </a:tcPr>
-                </a:tc>
-                <a:tc>
-                  <a:txBody>
-                    <a:bodyPr/>
-                    <a:lstStyle/>
-                    <a:p>
-                      <a:pPr>
-                        <a:defRPr sz="2000" b="0">
-                          <a:solidFill>
-                            <a:srgbClr val="15353B"/>
-                          </a:solidFill>
-                          <a:latin typeface="Segoe UI"/>
-                        </a:defRPr>
-                      </a:pPr>
-                      <a:r>
-                        <a:t>6.91</a:t>
-                      </a:r>
-                    </a:p>
-                  </a:txBody>
-                  <a:tcPr>
-                    <a:solidFill>
-                      <a:srgbClr val="F3F6F4"/>
-                    </a:solidFill>
-                  </a:tcPr>
-                </a:tc>
-                <a:tc>
-                  <a:txBody>
-                    <a:bodyPr/>
-                    <a:lstStyle/>
-                    <a:p>
-                      <a:pPr>
-                        <a:defRPr sz="2000" b="0">
-                          <a:solidFill>
-                            <a:srgbClr val="15353B"/>
-                          </a:solidFill>
-                          <a:latin typeface="Segoe UI"/>
-                        </a:defRPr>
-                      </a:pPr>
-                      <a:r>
-                        <a:t>4.67</a:t>
-                      </a:r>
-                    </a:p>
-                  </a:txBody>
-                  <a:tcPr>
-                    <a:solidFill>
-                      <a:srgbClr val="F3F6F4"/>
-                    </a:solidFill>
-                  </a:tcPr>
-                </a:tc>
-                <a:tc>
-                  <a:txBody>
-                    <a:bodyPr/>
-                    <a:lstStyle/>
-                    <a:p>
-                      <a:pPr>
-                        <a:defRPr sz="2000" b="0">
-                          <a:solidFill>
-                            <a:srgbClr val="15353B"/>
-                          </a:solidFill>
-                          <a:latin typeface="Segoe UI"/>
-                        </a:defRPr>
-                      </a:pPr>
-                      <a:r>
-                        <a:t>20.5/50</a:t>
-                      </a:r>
-                    </a:p>
-                  </a:txBody>
-                  <a:tcPr>
-                    <a:solidFill>
-                      <a:srgbClr val="F3F6F4"/>
-                    </a:solidFill>
-                  </a:tcPr>
-                </a:tc>
-                <a:tc>
-                  <a:txBody>
-                    <a:bodyPr/>
-                    <a:lstStyle/>
-                    <a:p>
-                      <a:pPr>
-                        <a:defRPr sz="2000" b="0">
-                          <a:solidFill>
-                            <a:srgbClr val="15353B"/>
-                          </a:solidFill>
-                          <a:latin typeface="Segoe UI"/>
-                        </a:defRPr>
-                      </a:pPr>
-                      <a:r>
-                        <a:t>1045.2</a:t>
-                      </a:r>
-                    </a:p>
-                  </a:txBody>
-                  <a:tcPr>
-                    <a:solidFill>
-                      <a:srgbClr val="F3F6F4"/>
-                    </a:solidFill>
-                  </a:tcPr>
-                </a:tc>
-              </a:tr>
-              <a:tr h="475488">
-                <a:tc>
-                  <a:txBody>
-                    <a:bodyPr/>
-                    <a:lstStyle/>
-                    <a:p>
-                      <a:pPr>
-                        <a:defRPr sz="2000" b="0">
-                          <a:solidFill>
-                            <a:srgbClr val="15353B"/>
-                          </a:solidFill>
-                          <a:latin typeface="Segoe UI"/>
-                        </a:defRPr>
-                      </a:pPr>
-                      <a:r>
-                        <a:t>Ridge</a:t>
-                      </a:r>
-                    </a:p>
-                  </a:txBody>
-                  <a:tcPr>
-                    <a:solidFill>
-                      <a:srgbClr val="F3F6F4"/>
-                    </a:solidFill>
-                  </a:tcPr>
-                </a:tc>
-                <a:tc>
-                  <a:txBody>
-                    <a:bodyPr/>
-                    <a:lstStyle/>
-                    <a:p>
-                      <a:pPr>
-                        <a:defRPr sz="2000" b="0">
-                          <a:solidFill>
-                            <a:srgbClr val="15353B"/>
-                          </a:solidFill>
-                          <a:latin typeface="Segoe UI"/>
-                        </a:defRPr>
-                      </a:pPr>
-                      <a:r>
-                        <a:t>9.01</a:t>
-                      </a:r>
-                    </a:p>
-                  </a:txBody>
-                  <a:tcPr>
-                    <a:solidFill>
-                      <a:srgbClr val="F3F6F4"/>
-                    </a:solidFill>
-                  </a:tcPr>
-                </a:tc>
-                <a:tc>
-                  <a:txBody>
-                    <a:bodyPr/>
-                    <a:lstStyle/>
-                    <a:p>
-                      <a:pPr>
-                        <a:defRPr sz="2000" b="0">
-                          <a:solidFill>
-                            <a:srgbClr val="15353B"/>
-                          </a:solidFill>
-                          <a:latin typeface="Segoe UI"/>
-                        </a:defRPr>
-                      </a:pPr>
-                      <a:r>
-                        <a:t>5.22</a:t>
-                      </a:r>
-                    </a:p>
-                  </a:txBody>
-                  <a:tcPr>
-                    <a:solidFill>
-                      <a:srgbClr val="F3F6F4"/>
-                    </a:solidFill>
-                  </a:tcPr>
-                </a:tc>
-                <a:tc>
-                  <a:txBody>
-                    <a:bodyPr/>
-                    <a:lstStyle/>
-                    <a:p>
-                      <a:pPr>
-                        <a:defRPr sz="2000" b="0">
-                          <a:solidFill>
-                            <a:srgbClr val="15353B"/>
-                          </a:solidFill>
-                          <a:latin typeface="Segoe UI"/>
-                        </a:defRPr>
-                      </a:pPr>
-                      <a:r>
-                        <a:t>20.0/50</a:t>
-                      </a:r>
-                    </a:p>
-                  </a:txBody>
-                  <a:tcPr>
-                    <a:solidFill>
-                      <a:srgbClr val="F3F6F4"/>
-                    </a:solidFill>
-                  </a:tcPr>
-                </a:tc>
-                <a:tc>
-                  <a:txBody>
-                    <a:bodyPr/>
-                    <a:lstStyle/>
-                    <a:p>
-                      <a:pPr>
-                        <a:defRPr sz="2000" b="0">
-                          <a:solidFill>
-                            <a:srgbClr val="15353B"/>
-                          </a:solidFill>
-                          <a:latin typeface="Segoe UI"/>
-                        </a:defRPr>
-                      </a:pPr>
-                      <a:r>
-                        <a:t>12.8</a:t>
-                      </a:r>
-                    </a:p>
-                  </a:txBody>
-                  <a:tcPr>
-                    <a:solidFill>
-                      <a:srgbClr val="F3F6F4"/>
-                    </a:solidFill>
-                  </a:tcPr>
-                </a:tc>
-              </a:tr>
-            </a:tbl>
-          </a:graphicData>
-        </a:graphic>
-      </p:graphicFrame>
-      <p:sp>
-        <p:nvSpPr>
-          <p:cNvPr id="6" name="Texto editable"/>
+              <a:t>Error absoluto medio del modelo</a:t>
+            </a:r>
+          </a:p>
+          <a:p>
+            <a:r>
+              <a:rPr sz="2400" b="0">
+                <a:solidFill>
+                  <a:srgbClr val="15353B"/>
+                </a:solidFill>
+                <a:latin typeface="Segoe UI"/>
+              </a:rPr>
+              <a:t>en las evaluaciones de 2021 y 2024.</a:t>
+            </a:r>
+          </a:p>
+        </p:txBody>
+      </p:sp>
+      <p:sp>
+        <p:nvSpPr>
+          <p:cNvPr id="6" name="Referencia simple: 8.88 pp"/>
           <p:cNvSpPr txBox="1"/>
           <p:nvPr/>
         </p:nvSpPr>
         <p:spPr>
           <a:xfrm>
-            <a:off x="594360" y="4526280"/>
-            <a:ext cx="10972800" cy="460502"/>
+            <a:off x="640080" y="4251960"/>
+            <a:ext cx="5029200" cy="499872"/>
           </a:xfrm>
           <a:prstGeom prst="rect">
             <a:avLst/>
@@ -6402,32 +6338,32 @@
         </p:spPr>
         <p:txBody>
           <a:bodyPr wrap="square" lIns="0" rIns="0" tIns="0" bIns="0">
-            <a:spAutoFit/>
+            <a:noAutofit/>
           </a:bodyPr>
           <a:lstStyle/>
           <a:p>
             <a:r>
-              <a:rPr sz="2500" b="1">
-                <a:solidFill>
-                  <a:srgbClr val="10685F"/>
-                </a:solidFill>
-                <a:latin typeface="Segoe UI"/>
-              </a:rPr>
-              <a:t>MAE medio 24.1% menor que Ridge.</a:t>
-            </a:r>
-          </a:p>
-        </p:txBody>
-      </p:sp>
-      <p:sp>
-        <p:nvSpPr>
-          <p:cNvPr id="7" name="Texto editable"/>
+              <a:rPr sz="2400" b="1">
+                <a:solidFill>
+                  <a:srgbClr val="15353B"/>
+                </a:solidFill>
+                <a:latin typeface="Segoe UI"/>
+              </a:rPr>
+              <a:t>Referencia simple: 8.88 pp</a:t>
+            </a:r>
+          </a:p>
+        </p:txBody>
+      </p:sp>
+      <p:sp>
+        <p:nvSpPr>
+          <p:cNvPr id="7" name="El modelo puede equivocarse."/>
           <p:cNvSpPr txBox="1"/>
           <p:nvPr/>
         </p:nvSpPr>
         <p:spPr>
           <a:xfrm>
-            <a:off x="594360" y="5029200"/>
-            <a:ext cx="10972800" cy="661924"/>
+            <a:off x="6400800" y="1691640"/>
+            <a:ext cx="5120640" cy="1071372"/>
           </a:xfrm>
           <a:prstGeom prst="rect">
             <a:avLst/>
@@ -6436,32 +6372,43 @@
         </p:spPr>
         <p:txBody>
           <a:bodyPr wrap="square" lIns="0" rIns="0" tIns="0" bIns="0">
-            <a:spAutoFit/>
+            <a:noAutofit/>
           </a:bodyPr>
           <a:lstStyle/>
           <a:p>
             <a:r>
-              <a:rPr sz="1900" b="0">
+              <a:rPr sz="3000" b="1">
                 <a:solidFill>
                   <a:srgbClr val="15353B"/>
                 </a:solidFill>
                 <a:latin typeface="Segoe UI"/>
               </a:rPr>
-              <a:t>Desempate por error ponderado (tolerancia MAE: 0.05 pp). Ridge es el más rápido. Selección retrospectiva.</a:t>
-            </a:r>
-          </a:p>
-        </p:txBody>
-      </p:sp>
-      <p:sp>
-        <p:nvSpPr>
-          <p:cNvPr id="8" name="Texto editable"/>
+              <a:t>El modelo puede</a:t>
+            </a:r>
+          </a:p>
+          <a:p>
+            <a:r>
+              <a:rPr sz="3000" b="1">
+                <a:solidFill>
+                  <a:srgbClr val="15353B"/>
+                </a:solidFill>
+                <a:latin typeface="Segoe UI"/>
+              </a:rPr>
+              <a:t>equivocarse.</a:t>
+            </a:r>
+          </a:p>
+        </p:txBody>
+      </p:sp>
+      <p:sp>
+        <p:nvSpPr>
+          <p:cNvPr id="8" name="En 2024, la referencia identificó 27 de "/>
           <p:cNvSpPr txBox="1"/>
           <p:nvPr/>
         </p:nvSpPr>
         <p:spPr>
           <a:xfrm>
-            <a:off x="594360" y="5650992"/>
-            <a:ext cx="10972800" cy="336550"/>
+            <a:off x="6400800" y="2743200"/>
+            <a:ext cx="5029200" cy="1261872"/>
           </a:xfrm>
           <a:prstGeom prst="rect">
             <a:avLst/>
@@ -6470,32 +6417,54 @@
         </p:spPr>
         <p:txBody>
           <a:bodyPr wrap="square" lIns="0" rIns="0" tIns="0" bIns="0">
-            <a:spAutoFit/>
+            <a:noAutofit/>
           </a:bodyPr>
           <a:lstStyle/>
           <a:p>
             <a:r>
-              <a:rPr sz="1700" b="0">
+              <a:rPr sz="2400" b="0">
                 <a:solidFill>
                   <a:srgbClr val="15353B"/>
                 </a:solidFill>
                 <a:latin typeface="Segoe UI"/>
               </a:rPr>
-              <a:t>Top50 en 2024: referencia 27/50; modelo 19/50. Menor error no garantiza mejor priorización.</a:t>
-            </a:r>
-          </a:p>
-        </p:txBody>
-      </p:sp>
-      <p:sp>
-        <p:nvSpPr>
-          <p:cNvPr id="9" name="Texto editable"/>
+              <a:t>En 2024, la referencia identificó 27</a:t>
+            </a:r>
+          </a:p>
+          <a:p>
+            <a:r>
+              <a:rPr sz="2400" b="0">
+                <a:solidFill>
+                  <a:srgbClr val="15353B"/>
+                </a:solidFill>
+                <a:latin typeface="Segoe UI"/>
+              </a:rPr>
+              <a:t>de los 50 municipios con mayor</a:t>
+            </a:r>
+          </a:p>
+          <a:p>
+            <a:r>
+              <a:rPr sz="2400" b="0">
+                <a:solidFill>
+                  <a:srgbClr val="15353B"/>
+                </a:solidFill>
+                <a:latin typeface="Segoe UI"/>
+              </a:rPr>
+              <a:t>abstención; el modelo, 19.</a:t>
+            </a:r>
+          </a:p>
+        </p:txBody>
+      </p:sp>
+      <p:sp>
+        <p:nvSpPr>
+          <p:cNvPr id="9" name="El acierto de 2027 se comprobará cuando "/>
           <p:cNvSpPr txBox="1"/>
           <p:nvPr/>
         </p:nvSpPr>
         <p:spPr>
           <a:xfrm>
-            <a:off x="594360" y="6245352"/>
-            <a:ext cx="10881360" cy="228092"/>
+            <a:off x="6400800" y="4572000"/>
+            <a:ext cx="5029200" cy="880872"/>
           </a:xfrm>
           <a:prstGeom prst="rect">
             <a:avLst/>
@@ -6504,18 +6473,63 @@
         </p:spPr>
         <p:txBody>
           <a:bodyPr wrap="square" lIns="0" rIns="0" tIns="0" bIns="0">
-            <a:spAutoFit/>
+            <a:noAutofit/>
           </a:bodyPr>
           <a:lstStyle/>
           <a:p>
             <a:r>
+              <a:rPr sz="2400" b="0">
+                <a:solidFill>
+                  <a:srgbClr val="15353B"/>
+                </a:solidFill>
+                <a:latin typeface="Segoe UI"/>
+              </a:rPr>
+              <a:t>El acierto de 2027 se comprobará</a:t>
+            </a:r>
+          </a:p>
+          <a:p>
+            <a:r>
+              <a:rPr sz="2400" b="0">
+                <a:solidFill>
+                  <a:srgbClr val="15353B"/>
+                </a:solidFill>
+                <a:latin typeface="Segoe UI"/>
+              </a:rPr>
+              <a:t>cuando existan resultados.</a:t>
+            </a:r>
+          </a:p>
+        </p:txBody>
+      </p:sp>
+      <p:sp>
+        <p:nvSpPr>
+          <p:cNvPr id="10" name="pp = puntos porcentuales. Modelo selecci"/>
+          <p:cNvSpPr txBox="1"/>
+          <p:nvPr/>
+        </p:nvSpPr>
+        <p:spPr>
+          <a:xfrm>
+            <a:off x="502920" y="6419088"/>
+            <a:ext cx="11155680" cy="277622"/>
+          </a:xfrm>
+          <a:prstGeom prst="rect">
+            <a:avLst/>
+          </a:prstGeom>
+          <a:noFill/>
+        </p:spPr>
+        <p:txBody>
+          <a:bodyPr wrap="square" lIns="0" rIns="0" tIns="0" bIns="0">
+            <a:noAutofit/>
+          </a:bodyPr>
+          <a:lstStyle/>
+          <a:p>
+            <a:r>
               <a:rPr sz="1000" b="0">
                 <a:solidFill>
                   <a:srgbClr val="587177"/>
                 </a:solidFill>
                 <a:latin typeface="Segoe UI"/>
               </a:rPr>
-              <a:t>Media de 2021/2024 con igual peso por elección. Referencia adicional: MAE 8.88 pp. No valida 2027.</a:t>
+              <a:t>pp = puntos porcentuales. Modelo seleccionado por error medio y desempate ponderado; selección retrospectiva.</a:t>
             </a:r>
           </a:p>
         </p:txBody>
@@ -6529,7 +6543,7 @@
 </file>
 
 <file path=ppt/slides/slide6.xml><?xml version="1.0" encoding="utf-8"?>
-<p:sld xmlns:a="http://schemas.openxmlformats.org/drawingml/2006/main" xmlns:p="http://schemas.openxmlformats.org/presentationml/2006/main">
+<p:sld xmlns:a="http://schemas.openxmlformats.org/drawingml/2006/main" xmlns:p="http://schemas.openxmlformats.org/presentationml/2006/main" xmlns:r="http://schemas.openxmlformats.org/officeDocument/2006/relationships">
   <p:cSld>
     <p:bg>
       <p:bgPr>
@@ -6548,14 +6562,14 @@
       <p:grpSpPr/>
       <p:sp>
         <p:nvSpPr>
-          <p:cNvPr id="3" name="Texto editable"/>
+          <p:cNvPr id="3" name="Consultar el territorio antes de actuar"/>
           <p:cNvSpPr txBox="1"/>
           <p:nvPr/>
         </p:nvSpPr>
         <p:spPr>
           <a:xfrm>
-            <a:off x="594360" y="320040"/>
-            <a:ext cx="10972800" cy="259080"/>
+            <a:off x="502920" y="320040"/>
+            <a:ext cx="11247120" cy="658622"/>
           </a:xfrm>
           <a:prstGeom prst="rect">
             <a:avLst/>
@@ -6564,32 +6578,56 @@
         </p:spPr>
         <p:txBody>
           <a:bodyPr wrap="square" lIns="0" rIns="0" tIns="0" bIns="0">
-            <a:spAutoFit/>
+            <a:noAutofit/>
           </a:bodyPr>
           <a:lstStyle/>
           <a:p>
             <a:r>
-              <a:rPr sz="1200" b="1">
+              <a:rPr sz="3400" b="1">
                 <a:solidFill>
                   <a:srgbClr val="10685F"/>
                 </a:solidFill>
                 <a:latin typeface="Segoe UI"/>
               </a:rPr>
-              <a:t>UMBRAL · 06</a:t>
-            </a:r>
-          </a:p>
-        </p:txBody>
-      </p:sp>
-      <p:sp>
-        <p:nvSpPr>
-          <p:cNvPr id="4" name="Texto editable"/>
+              <a:t>Consultar el territorio antes de actuar</a:t>
+            </a:r>
+          </a:p>
+        </p:txBody>
+      </p:sp>
+      <p:pic>
+        <p:nvPicPr>
+          <p:cNvPr id="4" name="Captura real de Umbral"/>
+          <p:cNvPicPr>
+            <a:picLocks noChangeAspect="1"/>
+          </p:cNvPicPr>
+          <p:nvPr/>
+        </p:nvPicPr>
+        <p:blipFill>
+          <a:blip r:embed="rIdUmbral5"/>
+          <a:stretch>
+            <a:fillRect/>
+          </a:stretch>
+        </p:blipFill>
+        <p:spPr>
+          <a:xfrm>
+            <a:off x="695858" y="1280160"/>
+            <a:ext cx="6517843" cy="4526280"/>
+          </a:xfrm>
+          <a:prstGeom prst="rect">
+            <a:avLst/>
+          </a:prstGeom>
+        </p:spPr>
+      </p:pic>
+      <p:sp>
+        <p:nvSpPr>
+          <p:cNvPr id="5" name="Qué revisar"/>
           <p:cNvSpPr txBox="1"/>
           <p:nvPr/>
         </p:nvSpPr>
         <p:spPr>
           <a:xfrm>
-            <a:off x="594360" y="822960"/>
-            <a:ext cx="10972800" cy="568960"/>
+            <a:off x="7726680" y="1508760"/>
+            <a:ext cx="3749040" cy="563372"/>
           </a:xfrm>
           <a:prstGeom prst="rect">
             <a:avLst/>
@@ -6598,32 +6636,110 @@
         </p:spPr>
         <p:txBody>
           <a:bodyPr wrap="square" lIns="0" rIns="0" tIns="0" bIns="0">
-            <a:spAutoFit/>
+            <a:noAutofit/>
           </a:bodyPr>
           <a:lstStyle/>
           <a:p>
             <a:r>
-              <a:rPr sz="3200" b="1">
+              <a:rPr sz="2800" b="1">
+                <a:solidFill>
+                  <a:srgbClr val="10685F"/>
+                </a:solidFill>
+                <a:latin typeface="Segoe UI"/>
+              </a:rPr>
+              <a:t>Qué revisar</a:t>
+            </a:r>
+          </a:p>
+        </p:txBody>
+      </p:sp>
+      <p:sp>
+        <p:nvSpPr>
+          <p:cNvPr id="6" name="Histórico de abstención.&#10; Calidad y cobe"/>
+          <p:cNvSpPr txBox="1"/>
+          <p:nvPr/>
+        </p:nvSpPr>
+        <p:spPr>
+          <a:xfrm>
+            <a:off x="7726680" y="2331720"/>
+            <a:ext cx="3749040" cy="1944497"/>
+          </a:xfrm>
+          <a:prstGeom prst="rect">
+            <a:avLst/>
+          </a:prstGeom>
+          <a:noFill/>
+        </p:spPr>
+        <p:txBody>
+          <a:bodyPr wrap="square" lIns="0" rIns="0" tIns="0" bIns="0">
+            <a:noAutofit/>
+          </a:bodyPr>
+          <a:lstStyle/>
+          <a:p>
+            <a:r>
+              <a:rPr sz="2300" b="0">
                 <a:solidFill>
                   <a:srgbClr val="15353B"/>
                 </a:solidFill>
                 <a:latin typeface="Segoe UI"/>
               </a:rPr>
-              <a:t>Evidencia externa y escenario territorial</a:t>
-            </a:r>
-          </a:p>
-        </p:txBody>
-      </p:sp>
-      <p:sp>
-        <p:nvSpPr>
-          <p:cNvPr id="5" name="Texto editable"/>
+              <a:t>Histórico de abstención.</a:t>
+            </a:r>
+          </a:p>
+          <a:p>
+            <a:r>
+              <a:rPr sz="2300" b="0">
+                <a:solidFill>
+                  <a:srgbClr val="15353B"/>
+                </a:solidFill>
+                <a:latin typeface="Segoe UI"/>
+              </a:rPr>
+              <a:t>Calidad y cobertura de</a:t>
+            </a:r>
+          </a:p>
+          <a:p>
+            <a:r>
+              <a:rPr sz="2300" b="0">
+                <a:solidFill>
+                  <a:srgbClr val="15353B"/>
+                </a:solidFill>
+                <a:latin typeface="Segoe UI"/>
+              </a:rPr>
+              <a:t>datos. Contexto y perfiles</a:t>
+            </a:r>
+          </a:p>
+          <a:p>
+            <a:r>
+              <a:rPr sz="2300" b="0">
+                <a:solidFill>
+                  <a:srgbClr val="15353B"/>
+                </a:solidFill>
+                <a:latin typeface="Segoe UI"/>
+              </a:rPr>
+              <a:t>agregados. Estabilidad de</a:t>
+            </a:r>
+          </a:p>
+          <a:p>
+            <a:r>
+              <a:rPr sz="2300" b="0">
+                <a:solidFill>
+                  <a:srgbClr val="15353B"/>
+                </a:solidFill>
+                <a:latin typeface="Segoe UI"/>
+              </a:rPr>
+              <a:t>la prioridad.</a:t>
+            </a:r>
+          </a:p>
+        </p:txBody>
+      </p:sp>
+      <p:sp>
+        <p:nvSpPr>
+          <p:cNvPr id="7" name="El mapa muestra dónde mirar; la informac"/>
           <p:cNvSpPr txBox="1"/>
           <p:nvPr/>
         </p:nvSpPr>
         <p:spPr>
           <a:xfrm>
-            <a:off x="594360" y="1965960"/>
-            <a:ext cx="10881360" cy="460502"/>
+            <a:off x="7726680" y="4709160"/>
+            <a:ext cx="3749040" cy="1118997"/>
           </a:xfrm>
           <a:prstGeom prst="rect">
             <a:avLst/>
@@ -6632,32 +6748,54 @@
         </p:spPr>
         <p:txBody>
           <a:bodyPr wrap="square" lIns="0" rIns="0" tIns="0" bIns="0">
-            <a:spAutoFit/>
+            <a:noAutofit/>
           </a:bodyPr>
           <a:lstStyle/>
           <a:p>
             <a:r>
-              <a:rPr sz="2500" b="1">
-                <a:solidFill>
-                  <a:srgbClr val="10685F"/>
-                </a:solidFill>
-                <a:latin typeface="Segoe UI"/>
-              </a:rPr>
-              <a:t>Acción y coeficiente publicado</a:t>
-            </a:r>
-          </a:p>
-        </p:txBody>
-      </p:sp>
-      <p:sp>
-        <p:nvSpPr>
-          <p:cNvPr id="6" name="Texto editable"/>
+              <a:rPr sz="2100" b="0">
+                <a:solidFill>
+                  <a:srgbClr val="15353B"/>
+                </a:solidFill>
+                <a:latin typeface="Segoe UI"/>
+              </a:rPr>
+              <a:t>El mapa muestra dónde mirar;</a:t>
+            </a:r>
+          </a:p>
+          <a:p>
+            <a:r>
+              <a:rPr sz="2100" b="0">
+                <a:solidFill>
+                  <a:srgbClr val="15353B"/>
+                </a:solidFill>
+                <a:latin typeface="Segoe UI"/>
+              </a:rPr>
+              <a:t>la información ayuda a</a:t>
+            </a:r>
+          </a:p>
+          <a:p>
+            <a:r>
+              <a:rPr sz="2100" b="0">
+                <a:solidFill>
+                  <a:srgbClr val="15353B"/>
+                </a:solidFill>
+                <a:latin typeface="Segoe UI"/>
+              </a:rPr>
+              <a:t>interpretar el territorio.</a:t>
+            </a:r>
+          </a:p>
+        </p:txBody>
+      </p:sp>
+      <p:sp>
+        <p:nvSpPr>
+          <p:cNvPr id="8" name="Umbral · aguas.exe · Reto 2"/>
           <p:cNvSpPr txBox="1"/>
           <p:nvPr/>
         </p:nvSpPr>
         <p:spPr>
           <a:xfrm>
-            <a:off x="594360" y="2554478"/>
-            <a:ext cx="10881360" cy="692912"/>
+            <a:off x="502920" y="6419088"/>
+            <a:ext cx="11155680" cy="277622"/>
           </a:xfrm>
           <a:prstGeom prst="rect">
             <a:avLst/>
@@ -6666,120 +6804,18 @@
         </p:spPr>
         <p:txBody>
           <a:bodyPr wrap="square" lIns="0" rIns="0" tIns="0" bIns="0">
-            <a:spAutoFit/>
+            <a:noAutofit/>
           </a:bodyPr>
           <a:lstStyle/>
           <a:p>
             <a:r>
-              <a:rPr sz="2000" b="0">
-                <a:solidFill>
-                  <a:srgbClr val="15353B"/>
-                </a:solidFill>
-                <a:latin typeface="Segoe UI"/>
-              </a:rPr>
-              <a:t>SMS Suecia: +0.30 pp ITT, intervalo 0.13–0.48. SMS EEUU: +0.25 pp ITT, intervalo 0.17–0.34. Llamada: +4.1 pp ATT, error estándar 1.7.</a:t>
-            </a:r>
-          </a:p>
-        </p:txBody>
-      </p:sp>
-      <p:sp>
-        <p:nvSpPr>
-          <p:cNvPr id="7" name="Texto editable"/>
-          <p:cNvSpPr txBox="1"/>
-          <p:nvPr/>
-        </p:nvSpPr>
-        <p:spPr>
-          <a:xfrm>
-            <a:off x="594360" y="3375406"/>
-            <a:ext cx="10881360" cy="1049274"/>
-          </a:xfrm>
-          <a:prstGeom prst="rect">
-            <a:avLst/>
-          </a:prstGeom>
-          <a:noFill/>
-        </p:spPr>
-        <p:txBody>
-          <a:bodyPr wrap="square" lIns="0" rIns="0" tIns="0" bIns="0">
-            <a:spAutoFit/>
-          </a:bodyPr>
-          <a:lstStyle/>
-          <a:p>
-            <a:r>
-              <a:rPr sz="2100" b="0">
-                <a:solidFill>
-                  <a:srgbClr val="15353B"/>
-                </a:solidFill>
-                <a:latin typeface="Segoe UI"/>
-              </a:rPr>
-              <a:t>Votos adicionales hipotéticos = cobertura × coeficiente / 100, limitados por abstención esperada entre cubiertos. El coeficiente ya mide cambio en participación, sin otra tasa de respuesta.</a:t>
-            </a:r>
-          </a:p>
-        </p:txBody>
-      </p:sp>
-      <p:sp>
-        <p:nvSpPr>
-          <p:cNvPr id="8" name="Texto editable"/>
-          <p:cNvSpPr txBox="1"/>
-          <p:nvPr/>
-        </p:nvSpPr>
-        <p:spPr>
-          <a:xfrm>
-            <a:off x="594360" y="4552696"/>
-            <a:ext cx="10881360" cy="692912"/>
-          </a:xfrm>
-          <a:prstGeom prst="rect">
-            <a:avLst/>
-          </a:prstGeom>
-          <a:noFill/>
-        </p:spPr>
-        <p:txBody>
-          <a:bodyPr wrap="square" lIns="0" rIns="0" tIns="0" bIns="0">
-            <a:spAutoFit/>
-          </a:bodyPr>
-          <a:lstStyle/>
-          <a:p>
-            <a:r>
-              <a:rPr sz="2000" b="0">
-                <a:solidFill>
-                  <a:srgbClr val="15353B"/>
-                </a:solidFill>
-                <a:latin typeface="Segoe UI"/>
-              </a:rPr>
-              <a:t>La comparación conserva todo el territorio estimable, incluso municipios sin atención. Umbrales base fijos y ponderación SV+NV 2024.</a:t>
-            </a:r>
-          </a:p>
-        </p:txBody>
-      </p:sp>
-      <p:sp>
-        <p:nvSpPr>
-          <p:cNvPr id="9" name="Texto editable"/>
-          <p:cNvSpPr txBox="1"/>
-          <p:nvPr/>
-        </p:nvSpPr>
-        <p:spPr>
-          <a:xfrm>
-            <a:off x="594360" y="6245352"/>
-            <a:ext cx="10881360" cy="228092"/>
-          </a:xfrm>
-          <a:prstGeom prst="rect">
-            <a:avLst/>
-          </a:prstGeom>
-          <a:noFill/>
-        </p:spPr>
-        <p:txBody>
-          <a:bodyPr wrap="square" lIns="0" rIns="0" tIns="0" bIns="0">
-            <a:spAutoFit/>
-          </a:bodyPr>
-          <a:lstStyle/>
-          <a:p>
-            <a:r>
               <a:rPr sz="1000" b="0">
                 <a:solidFill>
                   <a:srgbClr val="587177"/>
                 </a:solidFill>
                 <a:latin typeface="Segoe UI"/>
               </a:rPr>
-              <a:t>DOI: 10.1017/S0007123424000504; 10.1007/s11109-026-10121-2; 10.1177/0956797609359326. Traslado a México: supuesto.</a:t>
+              <a:t>Umbral · aguas.exe · Reto 2</a:t>
             </a:r>
           </a:p>
         </p:txBody>
@@ -6793,7 +6829,7 @@
 </file>
 
 <file path=ppt/slides/slide7.xml><?xml version="1.0" encoding="utf-8"?>
-<p:sld xmlns:a="http://schemas.openxmlformats.org/drawingml/2006/main" xmlns:p="http://schemas.openxmlformats.org/presentationml/2006/main">
+<p:sld xmlns:a="http://schemas.openxmlformats.org/drawingml/2006/main" xmlns:p="http://schemas.openxmlformats.org/presentationml/2006/main" xmlns:r="http://schemas.openxmlformats.org/officeDocument/2006/relationships">
   <p:cSld>
     <p:bg>
       <p:bgPr>
@@ -6812,14 +6848,14 @@
       <p:grpSpPr/>
       <p:sp>
         <p:nvSpPr>
-          <p:cNvPr id="3" name="Texto editable"/>
+          <p:cNvPr id="3" name="Simular una acción y comparar el cambio"/>
           <p:cNvSpPr txBox="1"/>
           <p:nvPr/>
         </p:nvSpPr>
         <p:spPr>
           <a:xfrm>
-            <a:off x="594360" y="320040"/>
-            <a:ext cx="10972800" cy="259080"/>
+            <a:off x="502920" y="320040"/>
+            <a:ext cx="11247120" cy="658622"/>
           </a:xfrm>
           <a:prstGeom prst="rect">
             <a:avLst/>
@@ -6828,32 +6864,32 @@
         </p:spPr>
         <p:txBody>
           <a:bodyPr wrap="square" lIns="0" rIns="0" tIns="0" bIns="0">
-            <a:spAutoFit/>
+            <a:noAutofit/>
           </a:bodyPr>
           <a:lstStyle/>
           <a:p>
             <a:r>
-              <a:rPr sz="1200" b="1">
+              <a:rPr sz="3400" b="1">
                 <a:solidFill>
                   <a:srgbClr val="10685F"/>
                 </a:solidFill>
                 <a:latin typeface="Segoe UI"/>
               </a:rPr>
-              <a:t>UMBRAL · 07</a:t>
-            </a:r>
-          </a:p>
-        </p:txBody>
-      </p:sp>
-      <p:sp>
-        <p:nvSpPr>
-          <p:cNvPr id="4" name="Texto editable"/>
+              <a:t>Simular una acción y comparar el cambio</a:t>
+            </a:r>
+          </a:p>
+        </p:txBody>
+      </p:sp>
+      <p:sp>
+        <p:nvSpPr>
+          <p:cNvPr id="4" name="1. Sin acción"/>
           <p:cNvSpPr txBox="1"/>
           <p:nvPr/>
         </p:nvSpPr>
         <p:spPr>
           <a:xfrm>
-            <a:off x="594360" y="822960"/>
-            <a:ext cx="10972800" cy="568960"/>
+            <a:off x="502920" y="1371600"/>
+            <a:ext cx="3474720" cy="515747"/>
           </a:xfrm>
           <a:prstGeom prst="rect">
             <a:avLst/>
@@ -6862,32 +6898,206 @@
         </p:spPr>
         <p:txBody>
           <a:bodyPr wrap="square" lIns="0" rIns="0" tIns="0" bIns="0">
-            <a:spAutoFit/>
+            <a:noAutofit/>
           </a:bodyPr>
           <a:lstStyle/>
           <a:p>
             <a:r>
-              <a:rPr sz="3200" b="1">
+              <a:rPr sz="2500" b="1">
+                <a:solidFill>
+                  <a:srgbClr val="10685F"/>
+                </a:solidFill>
+                <a:latin typeface="Segoe UI"/>
+              </a:rPr>
+              <a:t>1. Sin acción</a:t>
+            </a:r>
+          </a:p>
+        </p:txBody>
+      </p:sp>
+      <p:pic>
+        <p:nvPicPr>
+          <p:cNvPr id="5" name="Captura real de Umbral"/>
+          <p:cNvPicPr>
+            <a:picLocks noChangeAspect="1"/>
+          </p:cNvPicPr>
+          <p:nvPr/>
+        </p:nvPicPr>
+        <p:blipFill>
+          <a:blip r:embed="rIdUmbral3"/>
+          <a:stretch>
+            <a:fillRect/>
+          </a:stretch>
+        </p:blipFill>
+        <p:spPr>
+          <a:xfrm>
+            <a:off x="701936" y="1874520"/>
+            <a:ext cx="3030967" cy="2240280"/>
+          </a:xfrm>
+          <a:prstGeom prst="rect">
+            <a:avLst/>
+          </a:prstGeom>
+        </p:spPr>
+      </p:pic>
+      <p:sp>
+        <p:nvSpPr>
+          <p:cNvPr id="6" name="2. Con acción"/>
+          <p:cNvSpPr txBox="1"/>
+          <p:nvPr/>
+        </p:nvSpPr>
+        <p:spPr>
+          <a:xfrm>
+            <a:off x="4389120" y="1371600"/>
+            <a:ext cx="3474720" cy="515747"/>
+          </a:xfrm>
+          <a:prstGeom prst="rect">
+            <a:avLst/>
+          </a:prstGeom>
+          <a:noFill/>
+        </p:spPr>
+        <p:txBody>
+          <a:bodyPr wrap="square" lIns="0" rIns="0" tIns="0" bIns="0">
+            <a:noAutofit/>
+          </a:bodyPr>
+          <a:lstStyle/>
+          <a:p>
+            <a:r>
+              <a:rPr sz="2500" b="1">
+                <a:solidFill>
+                  <a:srgbClr val="10685F"/>
+                </a:solidFill>
+                <a:latin typeface="Segoe UI"/>
+              </a:rPr>
+              <a:t>2. Con acción</a:t>
+            </a:r>
+          </a:p>
+        </p:txBody>
+      </p:sp>
+      <p:pic>
+        <p:nvPicPr>
+          <p:cNvPr id="7" name="Captura real de Umbral"/>
+          <p:cNvPicPr>
+            <a:picLocks noChangeAspect="1"/>
+          </p:cNvPicPr>
+          <p:nvPr/>
+        </p:nvPicPr>
+        <p:blipFill>
+          <a:blip r:embed="rIdUmbral4"/>
+          <a:stretch>
+            <a:fillRect/>
+          </a:stretch>
+        </p:blipFill>
+        <p:spPr>
+          <a:xfrm>
+            <a:off x="4588136" y="1874520"/>
+            <a:ext cx="3030967" cy="2240280"/>
+          </a:xfrm>
+          <a:prstGeom prst="rect">
+            <a:avLst/>
+          </a:prstGeom>
+        </p:spPr>
+      </p:pic>
+      <p:sp>
+        <p:nvSpPr>
+          <p:cNvPr id="8" name="3. Diferencia"/>
+          <p:cNvSpPr txBox="1"/>
+          <p:nvPr/>
+        </p:nvSpPr>
+        <p:spPr>
+          <a:xfrm>
+            <a:off x="8275320" y="1371600"/>
+            <a:ext cx="3474720" cy="515747"/>
+          </a:xfrm>
+          <a:prstGeom prst="rect">
+            <a:avLst/>
+          </a:prstGeom>
+          <a:noFill/>
+        </p:spPr>
+        <p:txBody>
+          <a:bodyPr wrap="square" lIns="0" rIns="0" tIns="0" bIns="0">
+            <a:noAutofit/>
+          </a:bodyPr>
+          <a:lstStyle/>
+          <a:p>
+            <a:r>
+              <a:rPr sz="2500" b="1">
+                <a:solidFill>
+                  <a:srgbClr val="10685F"/>
+                </a:solidFill>
+                <a:latin typeface="Segoe UI"/>
+              </a:rPr>
+              <a:t>3. Diferencia</a:t>
+            </a:r>
+          </a:p>
+        </p:txBody>
+      </p:sp>
+      <p:pic>
+        <p:nvPicPr>
+          <p:cNvPr id="9" name="Captura real de Umbral"/>
+          <p:cNvPicPr>
+            <a:picLocks noChangeAspect="1"/>
+          </p:cNvPicPr>
+          <p:nvPr/>
+        </p:nvPicPr>
+        <p:blipFill>
+          <a:blip r:embed="rIdUmbral5"/>
+          <a:stretch>
+            <a:fillRect/>
+          </a:stretch>
+        </p:blipFill>
+        <p:spPr>
+          <a:xfrm>
+            <a:off x="8275320" y="2244452"/>
+            <a:ext cx="3429000" cy="1500416"/>
+          </a:xfrm>
+          <a:prstGeom prst="rect">
+            <a:avLst/>
+          </a:prstGeom>
+        </p:spPr>
+      </p:pic>
+      <p:sp>
+        <p:nvSpPr>
+          <p:cNvPr id="10" name="Elegir acción y cobertura → aplicar su c"/>
+          <p:cNvSpPr txBox="1"/>
+          <p:nvPr/>
+        </p:nvSpPr>
+        <p:spPr>
+          <a:xfrm>
+            <a:off x="594360" y="4434840"/>
+            <a:ext cx="10972800" cy="515747"/>
+          </a:xfrm>
+          <a:prstGeom prst="rect">
+            <a:avLst/>
+          </a:prstGeom>
+          <a:noFill/>
+        </p:spPr>
+        <p:txBody>
+          <a:bodyPr wrap="square" lIns="0" rIns="0" tIns="0" bIns="0">
+            <a:noAutofit/>
+          </a:bodyPr>
+          <a:lstStyle/>
+          <a:p>
+            <a:r>
+              <a:rPr sz="2500" b="1">
                 <a:solidFill>
                   <a:srgbClr val="15353B"/>
                 </a:solidFill>
                 <a:latin typeface="Segoe UI"/>
               </a:rPr>
-              <a:t>Plan estatal y semáforo en Umbral</a:t>
-            </a:r>
-          </a:p>
-        </p:txBody>
-      </p:sp>
-      <p:sp>
-        <p:nvSpPr>
-          <p:cNvPr id="5" name="Texto editable"/>
+              <a:t>Elegir acción y cobertura → aplicar su coeficiente → comparar tasas.</a:t>
+            </a:r>
+          </a:p>
+        </p:txBody>
+      </p:sp>
+      <p:sp>
+        <p:nvSpPr>
+          <p:cNvPr id="11" name="Reparto por prioridad o proporcional. Lo"/>
           <p:cNvSpPr txBox="1"/>
           <p:nvPr/>
         </p:nvSpPr>
         <p:spPr>
           <a:xfrm>
-            <a:off x="594360" y="1965960"/>
-            <a:ext cx="10881360" cy="460502"/>
+            <a:off x="594360" y="5166360"/>
+            <a:ext cx="10972800" cy="817372"/>
           </a:xfrm>
           <a:prstGeom prst="rect">
             <a:avLst/>
@@ -6896,32 +7106,43 @@
         </p:spPr>
         <p:txBody>
           <a:bodyPr wrap="square" lIns="0" rIns="0" tIns="0" bIns="0">
-            <a:spAutoFit/>
+            <a:noAutofit/>
           </a:bodyPr>
           <a:lstStyle/>
           <a:p>
             <a:r>
-              <a:rPr sz="2500" b="1">
-                <a:solidFill>
-                  <a:srgbClr val="10685F"/>
-                </a:solidFill>
-                <a:latin typeface="Segoe UI"/>
-              </a:rPr>
-              <a:t>Plan estatal con cálculo de referencia</a:t>
-            </a:r>
-          </a:p>
-        </p:txBody>
-      </p:sp>
-      <p:sp>
-        <p:nvSpPr>
-          <p:cNvPr id="6" name="Texto editable"/>
+              <a:rPr sz="2200" b="0">
+                <a:solidFill>
+                  <a:srgbClr val="15353B"/>
+                </a:solidFill>
+                <a:latin typeface="Segoe UI"/>
+              </a:rPr>
+              <a:t>Reparto por prioridad o proporcional. Los cálculos usan efectos publicados o supuestos</a:t>
+            </a:r>
+          </a:p>
+          <a:p>
+            <a:r>
+              <a:rPr sz="2200" b="0">
+                <a:solidFill>
+                  <a:srgbClr val="15353B"/>
+                </a:solidFill>
+                <a:latin typeface="Segoe UI"/>
+              </a:rPr>
+              <a:t>identificados; se mantienen los umbrales del semáforo.</a:t>
+            </a:r>
+          </a:p>
+        </p:txBody>
+      </p:sp>
+      <p:sp>
+        <p:nvSpPr>
+          <p:cNvPr id="12" name="Capturas del escenario estatal de Quinta"/>
           <p:cNvSpPr txBox="1"/>
           <p:nvPr/>
         </p:nvSpPr>
         <p:spPr>
           <a:xfrm>
-            <a:off x="594360" y="2554478"/>
-            <a:ext cx="10881360" cy="723900"/>
+            <a:off x="502920" y="6419088"/>
+            <a:ext cx="11155680" cy="277622"/>
           </a:xfrm>
           <a:prstGeom prst="rect">
             <a:avLst/>
@@ -6930,120 +7151,18 @@
         </p:spPr>
         <p:txBody>
           <a:bodyPr wrap="square" lIns="0" rIns="0" tIns="0" bIns="0">
-            <a:spAutoFit/>
+            <a:noAutofit/>
           </a:bodyPr>
           <a:lstStyle/>
           <a:p>
             <a:r>
-              <a:rPr sz="2100" b="0">
-                <a:solidFill>
-                  <a:srgbClr val="15353B"/>
-                </a:solidFill>
-                <a:latin typeface="Segoe UI"/>
-              </a:rPr>
-              <a:t>Cobertura fija del 10%; efecto supuesto de 1.5 pp entre alcanzados. El simulador separado permite explorar acciones. No es eficacia medida del plan.</a:t>
-            </a:r>
-          </a:p>
-        </p:txBody>
-      </p:sp>
-      <p:sp>
-        <p:nvSpPr>
-          <p:cNvPr id="7" name="Texto editable"/>
-          <p:cNvSpPr txBox="1"/>
-          <p:nvPr/>
-        </p:nvSpPr>
-        <p:spPr>
-          <a:xfrm>
-            <a:off x="594360" y="3406394"/>
-            <a:ext cx="10881360" cy="723900"/>
-          </a:xfrm>
-          <a:prstGeom prst="rect">
-            <a:avLst/>
-          </a:prstGeom>
-          <a:noFill/>
-        </p:spPr>
-        <p:txBody>
-          <a:bodyPr wrap="square" lIns="0" rIns="0" tIns="0" bIns="0">
-            <a:spAutoFit/>
-          </a:bodyPr>
-          <a:lstStyle/>
-          <a:p>
-            <a:r>
-              <a:rPr sz="2100" b="0">
-                <a:solidFill>
-                  <a:srgbClr val="15353B"/>
-                </a:solidFill>
-                <a:latin typeface="Segoe UI"/>
-              </a:rPr>
-              <a:t>Mapas sin/con acción con cortes nacionales fijos por tercios: bajo, medio y alto. Gris significa sin estimación; nunca cero.</a:t>
-            </a:r>
-          </a:p>
-        </p:txBody>
-      </p:sp>
-      <p:sp>
-        <p:nvSpPr>
-          <p:cNvPr id="8" name="Texto editable"/>
-          <p:cNvSpPr txBox="1"/>
-          <p:nvPr/>
-        </p:nvSpPr>
-        <p:spPr>
-          <a:xfrm>
-            <a:off x="594360" y="4258310"/>
-            <a:ext cx="10881360" cy="723900"/>
-          </a:xfrm>
-          <a:prstGeom prst="rect">
-            <a:avLst/>
-          </a:prstGeom>
-          <a:noFill/>
-        </p:spPr>
-        <p:txBody>
-          <a:bodyPr wrap="square" lIns="0" rIns="0" tIns="0" bIns="0">
-            <a:spAutoFit/>
-          </a:bodyPr>
-          <a:lstStyle/>
-          <a:p>
-            <a:r>
-              <a:rPr sz="2100" b="0">
-                <a:solidFill>
-                  <a:srgbClr val="15353B"/>
-                </a:solidFill>
-                <a:latin typeface="Segoe UI"/>
-              </a:rPr>
-              <a:t>Distribución proporcional; CSV con tasas antes/después, semáforo, cobertura, método y fuentes. La vista de diferencias muestra cambios pequeños.</a:t>
-            </a:r>
-          </a:p>
-        </p:txBody>
-      </p:sp>
-      <p:sp>
-        <p:nvSpPr>
-          <p:cNvPr id="9" name="Texto editable"/>
-          <p:cNvSpPr txBox="1"/>
-          <p:nvPr/>
-        </p:nvSpPr>
-        <p:spPr>
-          <a:xfrm>
-            <a:off x="594360" y="6245352"/>
-            <a:ext cx="10881360" cy="228092"/>
-          </a:xfrm>
-          <a:prstGeom prst="rect">
-            <a:avLst/>
-          </a:prstGeom>
-          <a:noFill/>
-        </p:spPr>
-        <p:txBody>
-          <a:bodyPr wrap="square" lIns="0" rIns="0" tIns="0" bIns="0">
-            <a:spAutoFit/>
-          </a:bodyPr>
-          <a:lstStyle/>
-          <a:p>
-            <a:r>
               <a:rPr sz="1000" b="0">
                 <a:solidFill>
                   <a:srgbClr val="587177"/>
                 </a:solidFill>
                 <a:latin typeface="Segoe UI"/>
               </a:rPr>
-              <a:t>Umbral y docs/PLANES_ACCION_ESTATALES_PARTICIPACION.md, sección 8. Propuestas por validar con el área usuaria.</a:t>
+              <a:t>Capturas del escenario estatal de Quintana Roo: cobertura 10%, efecto supuesto de 1.5 pp. No son el caso SMS.</a:t>
             </a:r>
           </a:p>
         </p:txBody>
@@ -7057,7 +7176,7 @@
 </file>
 
 <file path=ppt/slides/slide8.xml><?xml version="1.0" encoding="utf-8"?>
-<p:sld xmlns:a="http://schemas.openxmlformats.org/drawingml/2006/main" xmlns:p="http://schemas.openxmlformats.org/presentationml/2006/main">
+<p:sld xmlns:a="http://schemas.openxmlformats.org/drawingml/2006/main" xmlns:p="http://schemas.openxmlformats.org/presentationml/2006/main" xmlns:r="http://schemas.openxmlformats.org/officeDocument/2006/relationships">
   <p:cSld>
     <p:bg>
       <p:bgPr>
@@ -7076,14 +7195,14 @@
       <p:grpSpPr/>
       <p:sp>
         <p:nvSpPr>
-          <p:cNvPr id="3" name="Texto editable"/>
+          <p:cNvPr id="3" name="Planes para las 32 entidades"/>
           <p:cNvSpPr txBox="1"/>
           <p:nvPr/>
         </p:nvSpPr>
         <p:spPr>
           <a:xfrm>
-            <a:off x="594360" y="320040"/>
-            <a:ext cx="10972800" cy="259080"/>
+            <a:off x="502920" y="320040"/>
+            <a:ext cx="11247120" cy="658622"/>
           </a:xfrm>
           <a:prstGeom prst="rect">
             <a:avLst/>
@@ -7092,32 +7211,32 @@
         </p:spPr>
         <p:txBody>
           <a:bodyPr wrap="square" lIns="0" rIns="0" tIns="0" bIns="0">
-            <a:spAutoFit/>
+            <a:noAutofit/>
           </a:bodyPr>
           <a:lstStyle/>
           <a:p>
             <a:r>
-              <a:rPr sz="1200" b="1">
+              <a:rPr sz="3400" b="1">
                 <a:solidFill>
                   <a:srgbClr val="10685F"/>
                 </a:solidFill>
                 <a:latin typeface="Segoe UI"/>
               </a:rPr>
-              <a:t>UMBRAL · 08</a:t>
-            </a:r>
-          </a:p>
-        </p:txBody>
-      </p:sp>
-      <p:sp>
-        <p:nvSpPr>
-          <p:cNvPr id="4" name="Texto editable"/>
+              <a:t>Planes para las 32 entidades</a:t>
+            </a:r>
+          </a:p>
+        </p:txBody>
+      </p:sp>
+      <p:sp>
+        <p:nvSpPr>
+          <p:cNvPr id="4" name="Contexto + investigación mexicana"/>
           <p:cNvSpPr txBox="1"/>
           <p:nvPr/>
         </p:nvSpPr>
         <p:spPr>
           <a:xfrm>
-            <a:off x="594360" y="822960"/>
-            <a:ext cx="10972800" cy="568960"/>
+            <a:off x="594360" y="1508760"/>
+            <a:ext cx="5669280" cy="1007872"/>
           </a:xfrm>
           <a:prstGeom prst="rect">
             <a:avLst/>
@@ -7126,32 +7245,99 @@
         </p:spPr>
         <p:txBody>
           <a:bodyPr wrap="square" lIns="0" rIns="0" tIns="0" bIns="0">
-            <a:spAutoFit/>
+            <a:noAutofit/>
           </a:bodyPr>
           <a:lstStyle/>
           <a:p>
             <a:r>
-              <a:rPr sz="3200" b="1">
+              <a:rPr sz="2800" b="1">
+                <a:solidFill>
+                  <a:srgbClr val="10685F"/>
+                </a:solidFill>
+                <a:latin typeface="Segoe UI"/>
+              </a:rPr>
+              <a:t>Contexto + investigación</a:t>
+            </a:r>
+          </a:p>
+          <a:p>
+            <a:r>
+              <a:rPr sz="2800" b="1">
+                <a:solidFill>
+                  <a:srgbClr val="10685F"/>
+                </a:solidFill>
+                <a:latin typeface="Segoe UI"/>
+              </a:rPr>
+              <a:t>mexicana</a:t>
+            </a:r>
+          </a:p>
+        </p:txBody>
+      </p:sp>
+      <p:sp>
+        <p:nvSpPr>
+          <p:cNvPr id="5" name="Estudios de participación y abstencionis"/>
+          <p:cNvSpPr txBox="1"/>
+          <p:nvPr/>
+        </p:nvSpPr>
+        <p:spPr>
+          <a:xfrm>
+            <a:off x="594360" y="2423160"/>
+            <a:ext cx="5486400" cy="1261872"/>
+          </a:xfrm>
+          <a:prstGeom prst="rect">
+            <a:avLst/>
+          </a:prstGeom>
+          <a:noFill/>
+        </p:spPr>
+        <p:txBody>
+          <a:bodyPr wrap="square" lIns="0" rIns="0" tIns="0" bIns="0">
+            <a:noAutofit/>
+          </a:bodyPr>
+          <a:lstStyle/>
+          <a:p>
+            <a:r>
+              <a:rPr sz="2400" b="0">
                 <a:solidFill>
                   <a:srgbClr val="15353B"/>
                 </a:solidFill>
                 <a:latin typeface="Segoe UI"/>
               </a:rPr>
-              <a:t>Caso 23008: SMS con traslado hipotético</a:t>
-            </a:r>
-          </a:p>
-        </p:txBody>
-      </p:sp>
-      <p:sp>
-        <p:nvSpPr>
-          <p:cNvPr id="5" name="Texto editable"/>
+              <a:t>Estudios de participación y</a:t>
+            </a:r>
+          </a:p>
+          <a:p>
+            <a:r>
+              <a:rPr sz="2400" b="0">
+                <a:solidFill>
+                  <a:srgbClr val="15353B"/>
+                </a:solidFill>
+                <a:latin typeface="Segoe UI"/>
+              </a:rPr>
+              <a:t>abstencionismo, ENCUCI y ENCÍVICA</a:t>
+            </a:r>
+          </a:p>
+          <a:p>
+            <a:r>
+              <a:rPr sz="2400" b="0">
+                <a:solidFill>
+                  <a:srgbClr val="15353B"/>
+                </a:solidFill>
+                <a:latin typeface="Segoe UI"/>
+              </a:rPr>
+              <a:t>ayudan a orientar las propuestas.</a:t>
+            </a:r>
+          </a:p>
+        </p:txBody>
+      </p:sp>
+      <p:sp>
+        <p:nvSpPr>
+          <p:cNvPr id="6" name="Cada plan reúne acciones, actores propue"/>
           <p:cNvSpPr txBox="1"/>
           <p:nvPr/>
         </p:nvSpPr>
         <p:spPr>
           <a:xfrm>
-            <a:off x="594360" y="1965960"/>
-            <a:ext cx="10881360" cy="445008"/>
+            <a:off x="594360" y="3794760"/>
+            <a:ext cx="5486400" cy="880872"/>
           </a:xfrm>
           <a:prstGeom prst="rect">
             <a:avLst/>
@@ -7160,32 +7346,43 @@
         </p:spPr>
         <p:txBody>
           <a:bodyPr wrap="square" lIns="0" rIns="0" tIns="0" bIns="0">
-            <a:spAutoFit/>
+            <a:noAutofit/>
           </a:bodyPr>
           <a:lstStyle/>
           <a:p>
             <a:r>
-              <a:rPr sz="2400" b="1">
-                <a:solidFill>
-                  <a:srgbClr val="10685F"/>
-                </a:solidFill>
-                <a:latin typeface="Segoe UI"/>
-              </a:rPr>
-              <a:t>SOLIDARIDAD · catálogo histórico de Quintana Roo</a:t>
-            </a:r>
-          </a:p>
-        </p:txBody>
-      </p:sp>
-      <p:sp>
-        <p:nvSpPr>
-          <p:cNvPr id="6" name="Texto editable"/>
+              <a:rPr sz="2400" b="0">
+                <a:solidFill>
+                  <a:srgbClr val="15353B"/>
+                </a:solidFill>
+                <a:latin typeface="Segoe UI"/>
+              </a:rPr>
+              <a:t>Cada plan reúne acciones, actores</a:t>
+            </a:r>
+          </a:p>
+          <a:p>
+            <a:r>
+              <a:rPr sz="2400" b="0">
+                <a:solidFill>
+                  <a:srgbClr val="15353B"/>
+                </a:solidFill>
+                <a:latin typeface="Segoe UI"/>
+              </a:rPr>
+              <a:t>propuestos, indicadores y horizonte.</a:t>
+            </a:r>
+          </a:p>
+        </p:txBody>
+      </p:sp>
+      <p:sp>
+        <p:nvSpPr>
+          <p:cNvPr id="7" name="Escenario ilustrativo: 10% de cobertura "/>
           <p:cNvSpPr txBox="1"/>
           <p:nvPr/>
         </p:nvSpPr>
         <p:spPr>
           <a:xfrm>
-            <a:off x="594360" y="2538984"/>
-            <a:ext cx="10881360" cy="723900"/>
+            <a:off x="594360" y="4937760"/>
+            <a:ext cx="5486400" cy="849122"/>
           </a:xfrm>
           <a:prstGeom prst="rect">
             <a:avLst/>
@@ -7194,32 +7391,68 @@
         </p:spPr>
         <p:txBody>
           <a:bodyPr wrap="square" lIns="0" rIns="0" tIns="0" bIns="0">
-            <a:spAutoFit/>
+            <a:noAutofit/>
           </a:bodyPr>
           <a:lstStyle/>
           <a:p>
             <a:r>
-              <a:rPr sz="2100" b="0">
+              <a:rPr sz="2300" b="1">
                 <a:solidFill>
                   <a:srgbClr val="15353B"/>
                 </a:solidFill>
                 <a:latin typeface="Segoe UI"/>
               </a:rPr>
-              <a:t>HistGradientBoosting, puesto 9; referencia 3. Base 61.636222%. Frecuencia nacional top50 4/6.</a:t>
-            </a:r>
-          </a:p>
-        </p:txBody>
-      </p:sp>
-      <p:sp>
-        <p:nvSpPr>
-          <p:cNvPr id="7" name="Texto editable"/>
+              <a:t>Escenario ilustrativo: 10% de</a:t>
+            </a:r>
+          </a:p>
+          <a:p>
+            <a:r>
+              <a:rPr sz="2300" b="1">
+                <a:solidFill>
+                  <a:srgbClr val="15353B"/>
+                </a:solidFill>
+                <a:latin typeface="Segoe UI"/>
+              </a:rPr>
+              <a:t>cobertura y 1.5 pp de efecto supuesto.</a:t>
+            </a:r>
+          </a:p>
+        </p:txBody>
+      </p:sp>
+      <p:pic>
+        <p:nvPicPr>
+          <p:cNvPr id="8" name="Captura real de Umbral"/>
+          <p:cNvPicPr>
+            <a:picLocks noChangeAspect="1"/>
+          </p:cNvPicPr>
+          <p:nvPr/>
+        </p:nvPicPr>
+        <p:blipFill>
+          <a:blip r:embed="rIdUmbral3"/>
+          <a:srcRect b="75000"/>
+          <a:stretch>
+            <a:fillRect/>
+          </a:stretch>
+        </p:blipFill>
+        <p:spPr>
+          <a:xfrm>
+            <a:off x="6718275" y="1371600"/>
+            <a:ext cx="4760010" cy="4526280"/>
+          </a:xfrm>
+          <a:prstGeom prst="rect">
+            <a:avLst/>
+          </a:prstGeom>
+        </p:spPr>
+      </p:pic>
+      <p:sp>
+        <p:nvSpPr>
+          <p:cNvPr id="9" name="Propuestas del proyecto; costos y operac"/>
           <p:cNvSpPr txBox="1"/>
           <p:nvPr/>
         </p:nvSpPr>
         <p:spPr>
           <a:xfrm>
-            <a:off x="594360" y="3390900"/>
-            <a:ext cx="10881360" cy="754888"/>
+            <a:off x="502920" y="6419088"/>
+            <a:ext cx="11155680" cy="277622"/>
           </a:xfrm>
           <a:prstGeom prst="rect">
             <a:avLst/>
@@ -7228,86 +7461,18 @@
         </p:spPr>
         <p:txBody>
           <a:bodyPr wrap="square" lIns="0" rIns="0" tIns="0" bIns="0">
-            <a:spAutoFit/>
+            <a:noAutofit/>
           </a:bodyPr>
           <a:lstStyle/>
           <a:p>
             <a:r>
-              <a:rPr sz="2200" b="0">
-                <a:solidFill>
-                  <a:srgbClr val="15353B"/>
-                </a:solidFill>
-                <a:latin typeface="Segoe UI"/>
-              </a:rPr>
-              <a:t>1,000 personas asignadas a SMS Suecia: 3 votos adicionales hipotéticos; rango externo 1.3–4.8.</a:t>
-            </a:r>
-          </a:p>
-        </p:txBody>
-      </p:sp>
-      <p:sp>
-        <p:nvSpPr>
-          <p:cNvPr id="8" name="Texto editable"/>
-          <p:cNvSpPr txBox="1"/>
-          <p:nvPr/>
-        </p:nvSpPr>
-        <p:spPr>
-          <a:xfrm>
-            <a:off x="594360" y="4273804"/>
-            <a:ext cx="10881360" cy="398526"/>
-          </a:xfrm>
-          <a:prstGeom prst="rect">
-            <a:avLst/>
-          </a:prstGeom>
-          <a:noFill/>
-        </p:spPr>
-        <p:txBody>
-          <a:bodyPr wrap="square" lIns="0" rIns="0" tIns="0" bIns="0">
-            <a:spAutoFit/>
-          </a:bodyPr>
-          <a:lstStyle/>
-          <a:p>
-            <a:r>
-              <a:rPr sz="2100" b="0">
-                <a:solidFill>
-                  <a:srgbClr val="15353B"/>
-                </a:solidFill>
-                <a:latin typeface="Segoe UI"/>
-              </a:rPr>
-              <a:t>Posterior 61.635048%. Reducción 0.001175 pp. Traslado a México sujeto a evaluación.</a:t>
-            </a:r>
-          </a:p>
-        </p:txBody>
-      </p:sp>
-      <p:sp>
-        <p:nvSpPr>
-          <p:cNvPr id="9" name="Texto editable"/>
-          <p:cNvSpPr txBox="1"/>
-          <p:nvPr/>
-        </p:nvSpPr>
-        <p:spPr>
-          <a:xfrm>
-            <a:off x="594360" y="6245352"/>
-            <a:ext cx="10881360" cy="228092"/>
-          </a:xfrm>
-          <a:prstGeom prst="rect">
-            <a:avLst/>
-          </a:prstGeom>
-          <a:noFill/>
-        </p:spPr>
-        <p:txBody>
-          <a:bodyPr wrap="square" lIns="0" rIns="0" tIns="0" bIns="0">
-            <a:spAutoFit/>
-          </a:bodyPr>
-          <a:lstStyle/>
-          <a:p>
-            <a:r>
               <a:rPr sz="1000" b="0">
                 <a:solidFill>
                   <a:srgbClr val="587177"/>
                 </a:solidFill>
                 <a:latin typeface="Segoe UI"/>
               </a:rPr>
-              <a:t>Fuente: entrega/caso_municipal.json. Modelo seleccionado del benchmark. SV+NV 2024: 255,362. DOI 10.1017/S0007123424000504.</a:t>
+              <a:t>Propuestas del proyecto; costos y operación requieren acuerdo local. El 1.5 pp no es eficacia medida de los planes.</a:t>
             </a:r>
           </a:p>
         </p:txBody>
@@ -7340,14 +7505,14 @@
       <p:grpSpPr/>
       <p:sp>
         <p:nvSpPr>
-          <p:cNvPr id="3" name="Texto editable"/>
+          <p:cNvPr id="3" name="SMS en Solidaridad: cobertura municipal"/>
           <p:cNvSpPr txBox="1"/>
           <p:nvPr/>
         </p:nvSpPr>
         <p:spPr>
           <a:xfrm>
-            <a:off x="594360" y="320040"/>
-            <a:ext cx="10972800" cy="259080"/>
+            <a:off x="502920" y="320040"/>
+            <a:ext cx="11247120" cy="658622"/>
           </a:xfrm>
           <a:prstGeom prst="rect">
             <a:avLst/>
@@ -7356,32 +7521,32 @@
         </p:spPr>
         <p:txBody>
           <a:bodyPr wrap="square" lIns="0" rIns="0" tIns="0" bIns="0">
-            <a:spAutoFit/>
+            <a:noAutofit/>
           </a:bodyPr>
           <a:lstStyle/>
           <a:p>
             <a:r>
-              <a:rPr sz="1200" b="1">
+              <a:rPr sz="3400" b="1">
                 <a:solidFill>
                   <a:srgbClr val="10685F"/>
                 </a:solidFill>
                 <a:latin typeface="Segoe UI"/>
               </a:rPr>
-              <a:t>UMBRAL · 09</a:t>
-            </a:r>
-          </a:p>
-        </p:txBody>
-      </p:sp>
-      <p:sp>
-        <p:nvSpPr>
-          <p:cNvPr id="4" name="Texto editable"/>
+              <a:t>SMS en Solidaridad: cobertura municipal</a:t>
+            </a:r>
+          </a:p>
+        </p:txBody>
+      </p:sp>
+      <p:sp>
+        <p:nvSpPr>
+          <p:cNvPr id="4" name="SOLIDARIDAD · clave histórica 23008 · Qu"/>
           <p:cNvSpPr txBox="1"/>
           <p:nvPr/>
         </p:nvSpPr>
         <p:spPr>
           <a:xfrm>
-            <a:off x="594360" y="822960"/>
-            <a:ext cx="10972800" cy="568960"/>
+            <a:off x="594360" y="1371600"/>
+            <a:ext cx="10972800" cy="515747"/>
           </a:xfrm>
           <a:prstGeom prst="rect">
             <a:avLst/>
@@ -7390,32 +7555,32 @@
         </p:spPr>
         <p:txBody>
           <a:bodyPr wrap="square" lIns="0" rIns="0" tIns="0" bIns="0">
-            <a:spAutoFit/>
+            <a:noAutofit/>
           </a:bodyPr>
           <a:lstStyle/>
           <a:p>
             <a:r>
-              <a:rPr sz="3200" b="1">
+              <a:rPr sz="2500" b="1">
                 <a:solidFill>
                   <a:srgbClr val="15353B"/>
                 </a:solidFill>
                 <a:latin typeface="Segoe UI"/>
               </a:rPr>
-              <a:t>De la ficha a un plan verificable</a:t>
-            </a:r>
-          </a:p>
-        </p:txBody>
-      </p:sp>
-      <p:sp>
-        <p:nvSpPr>
-          <p:cNvPr id="5" name="Texto editable"/>
+              <a:t>SOLIDARIDAD · clave histórica 23008 · Quintana Roo</a:t>
+            </a:r>
+          </a:p>
+        </p:txBody>
+      </p:sp>
+      <p:sp>
+        <p:nvSpPr>
+          <p:cNvPr id="5" name="Población proyectada 2027: 437,681 habit"/>
           <p:cNvSpPr txBox="1"/>
           <p:nvPr/>
         </p:nvSpPr>
         <p:spPr>
           <a:xfrm>
-            <a:off x="594360" y="1965960"/>
-            <a:ext cx="10881360" cy="460502"/>
+            <a:off x="594360" y="1874520"/>
+            <a:ext cx="10972800" cy="468122"/>
           </a:xfrm>
           <a:prstGeom prst="rect">
             <a:avLst/>
@@ -7424,32 +7589,100 @@
         </p:spPr>
         <p:txBody>
           <a:bodyPr wrap="square" lIns="0" rIns="0" tIns="0" bIns="0">
-            <a:spAutoFit/>
+            <a:noAutofit/>
           </a:bodyPr>
           <a:lstStyle/>
           <a:p>
             <a:r>
-              <a:rPr sz="2500" b="1">
+              <a:rPr sz="2200" b="0">
+                <a:solidFill>
+                  <a:srgbClr val="15353B"/>
+                </a:solidFill>
+                <a:latin typeface="Segoe UI"/>
+              </a:rPr>
+              <a:t>Población proyectada 2027: 437,681 habitantes.</a:t>
+            </a:r>
+          </a:p>
+        </p:txBody>
+      </p:sp>
+      <p:sp>
+        <p:nvSpPr>
+          <p:cNvPr id="6" name="Investigación en Suecia: recordatorios e"/>
+          <p:cNvSpPr txBox="1"/>
+          <p:nvPr/>
+        </p:nvSpPr>
+        <p:spPr>
+          <a:xfrm>
+            <a:off x="594360" y="2286000"/>
+            <a:ext cx="10972800" cy="452247"/>
+          </a:xfrm>
+          <a:prstGeom prst="rect">
+            <a:avLst/>
+          </a:prstGeom>
+          <a:noFill/>
+        </p:spPr>
+        <p:txBody>
+          <a:bodyPr wrap="square" lIns="0" rIns="0" tIns="0" bIns="0">
+            <a:noAutofit/>
+          </a:bodyPr>
+          <a:lstStyle/>
+          <a:p>
+            <a:r>
+              <a:rPr sz="2100" b="0">
+                <a:solidFill>
+                  <a:srgbClr val="15353B"/>
+                </a:solidFill>
+                <a:latin typeface="Segoe UI"/>
+              </a:rPr>
+              <a:t>Investigación en Suecia: recordatorios electorales enviados por SMS.</a:t>
+            </a:r>
+          </a:p>
+        </p:txBody>
+      </p:sp>
+      <p:sp>
+        <p:nvSpPr>
+          <p:cNvPr id="7" name="255,362"/>
+          <p:cNvSpPr txBox="1"/>
+          <p:nvPr/>
+        </p:nvSpPr>
+        <p:spPr>
+          <a:xfrm>
+            <a:off x="594360" y="2834640"/>
+            <a:ext cx="3200400" cy="690372"/>
+          </a:xfrm>
+          <a:prstGeom prst="rect">
+            <a:avLst/>
+          </a:prstGeom>
+          <a:noFill/>
+        </p:spPr>
+        <p:txBody>
+          <a:bodyPr wrap="square" lIns="0" rIns="0" tIns="0" bIns="0">
+            <a:noAutofit/>
+          </a:bodyPr>
+          <a:lstStyle/>
+          <a:p>
+            <a:r>
+              <a:rPr sz="3600" b="1">
                 <a:solidFill>
                   <a:srgbClr val="10685F"/>
                 </a:solidFill>
                 <a:latin typeface="Segoe UI"/>
               </a:rPr>
-              <a:t>Recursos, condiciones y medición</a:t>
-            </a:r>
-          </a:p>
-        </p:txBody>
-      </p:sp>
-      <p:sp>
-        <p:nvSpPr>
-          <p:cNvPr id="6" name="Texto editable"/>
+              <a:t>255,362</a:t>
+            </a:r>
+          </a:p>
+        </p:txBody>
+      </p:sp>
+      <p:sp>
+        <p:nvSpPr>
+          <p:cNvPr id="8" name="Personas de la base electoral"/>
           <p:cNvSpPr txBox="1"/>
           <p:nvPr/>
         </p:nvSpPr>
         <p:spPr>
           <a:xfrm>
-            <a:off x="594360" y="2554478"/>
-            <a:ext cx="10881360" cy="723900"/>
+            <a:off x="594360" y="3611880"/>
+            <a:ext cx="3200400" cy="753872"/>
           </a:xfrm>
           <a:prstGeom prst="rect">
             <a:avLst/>
@@ -7458,32 +7691,43 @@
         </p:spPr>
         <p:txBody>
           <a:bodyPr wrap="square" lIns="0" rIns="0" tIns="0" bIns="0">
-            <a:spAutoFit/>
+            <a:noAutofit/>
           </a:bodyPr>
           <a:lstStyle/>
           <a:p>
             <a:r>
-              <a:rPr sz="2100" b="0">
+              <a:rPr sz="2000" b="0">
                 <a:solidFill>
                   <a:srgbClr val="15353B"/>
                 </a:solidFill>
                 <a:latin typeface="Segoe UI"/>
               </a:rPr>
-              <a:t>Definir prioridad y cobertura; exportar territorio, acción, fuente, distribución y supuestos. Revisar la estabilidad por separado.</a:t>
-            </a:r>
-          </a:p>
-        </p:txBody>
-      </p:sp>
-      <p:sp>
-        <p:nvSpPr>
-          <p:cNvPr id="7" name="Texto editable"/>
+              <a:t>Personas de la base</a:t>
+            </a:r>
+          </a:p>
+          <a:p>
+            <a:r>
+              <a:rPr sz="2000" b="0">
+                <a:solidFill>
+                  <a:srgbClr val="15353B"/>
+                </a:solidFill>
+                <a:latin typeface="Segoe UI"/>
+              </a:rPr>
+              <a:t>electoral</a:t>
+            </a:r>
+          </a:p>
+        </p:txBody>
+      </p:sp>
+      <p:sp>
+        <p:nvSpPr>
+          <p:cNvPr id="9" name="0.30 pp"/>
           <p:cNvSpPr txBox="1"/>
           <p:nvPr/>
         </p:nvSpPr>
         <p:spPr>
           <a:xfrm>
-            <a:off x="594360" y="3406394"/>
-            <a:ext cx="10881360" cy="723900"/>
+            <a:off x="4480560" y="2834640"/>
+            <a:ext cx="3200400" cy="690372"/>
           </a:xfrm>
           <a:prstGeom prst="rect">
             <a:avLst/>
@@ -7492,32 +7736,77 @@
         </p:spPr>
         <p:txBody>
           <a:bodyPr wrap="square" lIns="0" rIns="0" tIns="0" bIns="0">
-            <a:spAutoFit/>
+            <a:noAutofit/>
           </a:bodyPr>
           <a:lstStyle/>
           <a:p>
             <a:r>
-              <a:rPr sz="2100" b="0">
+              <a:rPr sz="3600" b="1">
+                <a:solidFill>
+                  <a:srgbClr val="10685F"/>
+                </a:solidFill>
+                <a:latin typeface="Segoe UI"/>
+              </a:rPr>
+              <a:t>0.30 pp</a:t>
+            </a:r>
+          </a:p>
+        </p:txBody>
+      </p:sp>
+      <p:sp>
+        <p:nvSpPr>
+          <p:cNvPr id="10" name="Efecto publicado del recordatorio"/>
+          <p:cNvSpPr txBox="1"/>
+          <p:nvPr/>
+        </p:nvSpPr>
+        <p:spPr>
+          <a:xfrm>
+            <a:off x="4480560" y="3611880"/>
+            <a:ext cx="3200400" cy="753872"/>
+          </a:xfrm>
+          <a:prstGeom prst="rect">
+            <a:avLst/>
+          </a:prstGeom>
+          <a:noFill/>
+        </p:spPr>
+        <p:txBody>
+          <a:bodyPr wrap="square" lIns="0" rIns="0" tIns="0" bIns="0">
+            <a:noAutofit/>
+          </a:bodyPr>
+          <a:lstStyle/>
+          <a:p>
+            <a:r>
+              <a:rPr sz="2000" b="0">
                 <a:solidFill>
                   <a:srgbClr val="15353B"/>
                 </a:solidFill>
                 <a:latin typeface="Segoe UI"/>
               </a:rPr>
-              <a:t>Registrar alcance único agregado, horas y conocimiento previo/posterior. El perfil por edad describe grupos agregados y no demuestra barreras.</a:t>
-            </a:r>
-          </a:p>
-        </p:txBody>
-      </p:sp>
-      <p:sp>
-        <p:nvSpPr>
-          <p:cNvPr id="8" name="Texto editable"/>
+              <a:t>Efecto publicado del</a:t>
+            </a:r>
+          </a:p>
+          <a:p>
+            <a:r>
+              <a:rPr sz="2000" b="0">
+                <a:solidFill>
+                  <a:srgbClr val="15353B"/>
+                </a:solidFill>
+                <a:latin typeface="Segoe UI"/>
+              </a:rPr>
+              <a:t>recordatorio</a:t>
+            </a:r>
+          </a:p>
+        </p:txBody>
+      </p:sp>
+      <p:sp>
+        <p:nvSpPr>
+          <p:cNvPr id="11" name="≈ 766 votos"/>
           <p:cNvSpPr txBox="1"/>
           <p:nvPr/>
         </p:nvSpPr>
         <p:spPr>
           <a:xfrm>
-            <a:off x="594360" y="4258310"/>
-            <a:ext cx="10881360" cy="723900"/>
+            <a:off x="8366760" y="2834640"/>
+            <a:ext cx="3200400" cy="690372"/>
           </a:xfrm>
           <a:prstGeom prst="rect">
             <a:avLst/>
@@ -7526,32 +7815,66 @@
         </p:spPr>
         <p:txBody>
           <a:bodyPr wrap="square" lIns="0" rIns="0" tIns="0" bIns="0">
-            <a:spAutoFit/>
+            <a:noAutofit/>
           </a:bodyPr>
           <a:lstStyle/>
           <a:p>
             <a:r>
-              <a:rPr sz="2100" b="0">
+              <a:rPr sz="3600" b="1">
+                <a:solidFill>
+                  <a:srgbClr val="10685F"/>
+                </a:solidFill>
+                <a:latin typeface="Segoe UI"/>
+              </a:rPr>
+              <a:t>≈ 766 votos</a:t>
+            </a:r>
+          </a:p>
+        </p:txBody>
+      </p:sp>
+      <p:sp>
+        <p:nvSpPr>
+          <p:cNvPr id="12" name="Adicionales hipotéticos"/>
+          <p:cNvSpPr txBox="1"/>
+          <p:nvPr/>
+        </p:nvSpPr>
+        <p:spPr>
+          <a:xfrm>
+            <a:off x="8366760" y="3611880"/>
+            <a:ext cx="3200400" cy="436372"/>
+          </a:xfrm>
+          <a:prstGeom prst="rect">
+            <a:avLst/>
+          </a:prstGeom>
+          <a:noFill/>
+        </p:spPr>
+        <p:txBody>
+          <a:bodyPr wrap="square" lIns="0" rIns="0" tIns="0" bIns="0">
+            <a:noAutofit/>
+          </a:bodyPr>
+          <a:lstStyle/>
+          <a:p>
+            <a:r>
+              <a:rPr sz="2000" b="0">
                 <a:solidFill>
                   <a:srgbClr val="15353B"/>
                 </a:solidFill>
                 <a:latin typeface="Segoe UI"/>
               </a:rPr>
-              <a:t>Validar límites, sedes y atribuciones. Un efecto sobre participación requiere evaluación comparativa y protocolo previo.</a:t>
-            </a:r>
-          </a:p>
-        </p:txBody>
-      </p:sp>
-      <p:sp>
-        <p:nvSpPr>
-          <p:cNvPr id="9" name="Texto editable"/>
+              <a:t>Adicionales hipotéticos</a:t>
+            </a:r>
+          </a:p>
+        </p:txBody>
+      </p:sp>
+      <p:sp>
+        <p:nvSpPr>
+          <p:cNvPr id="13" name="255,362 × 0.30 / 100 = 766.086"/>
           <p:cNvSpPr txBox="1"/>
           <p:nvPr/>
         </p:nvSpPr>
         <p:spPr>
           <a:xfrm>
-            <a:off x="594360" y="6245352"/>
-            <a:ext cx="10881360" cy="228092"/>
+            <a:off x="594360" y="4343400"/>
+            <a:ext cx="10972800" cy="579247"/>
           </a:xfrm>
           <a:prstGeom prst="rect">
             <a:avLst/>
@@ -7560,18 +7883,97 @@
         </p:spPr>
         <p:txBody>
           <a:bodyPr wrap="square" lIns="0" rIns="0" tIns="0" bIns="0">
-            <a:spAutoFit/>
+            <a:noAutofit/>
           </a:bodyPr>
           <a:lstStyle/>
           <a:p>
             <a:r>
+              <a:rPr sz="2900" b="1">
+                <a:solidFill>
+                  <a:srgbClr val="15353B"/>
+                </a:solidFill>
+                <a:latin typeface="Segoe UI"/>
+              </a:rPr>
+              <a:t>255,362 × 0.30 / 100 = 766.086</a:t>
+            </a:r>
+          </a:p>
+        </p:txBody>
+      </p:sp>
+      <p:sp>
+        <p:nvSpPr>
+          <p:cNvPr id="14" name="La cobertura se limita a SV+NV 2024, no "/>
+          <p:cNvSpPr txBox="1"/>
+          <p:nvPr/>
+        </p:nvSpPr>
+        <p:spPr>
+          <a:xfrm>
+            <a:off x="594360" y="5166360"/>
+            <a:ext cx="10972800" cy="817372"/>
+          </a:xfrm>
+          <a:prstGeom prst="rect">
+            <a:avLst/>
+          </a:prstGeom>
+          <a:noFill/>
+        </p:spPr>
+        <p:txBody>
+          <a:bodyPr wrap="square" lIns="0" rIns="0" tIns="0" bIns="0">
+            <a:noAutofit/>
+          </a:bodyPr>
+          <a:lstStyle/>
+          <a:p>
+            <a:r>
+              <a:rPr sz="2200" b="0">
+                <a:solidFill>
+                  <a:srgbClr val="15353B"/>
+                </a:solidFill>
+                <a:latin typeface="Segoe UI"/>
+              </a:rPr>
+              <a:t>La cobertura se limita a SV+NV 2024, no a todos los habitantes. Reducción municipal:</a:t>
+            </a:r>
+          </a:p>
+          <a:p>
+            <a:r>
+              <a:rPr sz="2200" b="0">
+                <a:solidFill>
+                  <a:srgbClr val="15353B"/>
+                </a:solidFill>
+                <a:latin typeface="Segoe UI"/>
+              </a:rPr>
+              <a:t>0.30 pp, bajo el supuesto de cobertura total.</a:t>
+            </a:r>
+          </a:p>
+        </p:txBody>
+      </p:sp>
+      <p:sp>
+        <p:nvSpPr>
+          <p:cNvPr id="15" name="Población: proyección CONAPO 2027. SMS: "/>
+          <p:cNvSpPr txBox="1"/>
+          <p:nvPr/>
+        </p:nvSpPr>
+        <p:spPr>
+          <a:xfrm>
+            <a:off x="502920" y="6419088"/>
+            <a:ext cx="11155680" cy="277622"/>
+          </a:xfrm>
+          <a:prstGeom prst="rect">
+            <a:avLst/>
+          </a:prstGeom>
+          <a:noFill/>
+        </p:spPr>
+        <p:txBody>
+          <a:bodyPr wrap="square" lIns="0" rIns="0" tIns="0" bIns="0">
+            <a:noAutofit/>
+          </a:bodyPr>
+          <a:lstStyle/>
+          <a:p>
+            <a:r>
               <a:rPr sz="1000" b="0">
                 <a:solidFill>
                   <a:srgbClr val="587177"/>
                 </a:solidFill>
                 <a:latin typeface="Segoe UI"/>
               </a:rPr>
-              <a:t>Caso completo: entrega/CASO_MUNICIPAL.md. Guion de cuatro bloques: entrega/GUION_PRESENTACION.md.</a:t>
+              <a:t>Población: proyección CONAPO 2027. SMS: Lindgren et al. (2025), transferencia hipotética. Estabilidad top50: 4/6.</a:t>
             </a:r>
           </a:p>
         </p:txBody>
